--- a/PPT/실로폰_볼트_각인_검사기.pptx
+++ b/PPT/실로폰_볼트_각인_검사기.pptx
@@ -5,7 +5,7 @@
     <p:sldMasterId id="2147483648" r:id="rId1"/>
   </p:sldMasterIdLst>
   <p:notesMasterIdLst>
-    <p:notesMasterId r:id="rId23"/>
+    <p:notesMasterId r:id="rId24"/>
   </p:notesMasterIdLst>
   <p:sldIdLst>
     <p:sldId id="256" r:id="rId2"/>
@@ -19,16 +19,17 @@
     <p:sldId id="276" r:id="rId10"/>
     <p:sldId id="277" r:id="rId11"/>
     <p:sldId id="257" r:id="rId12"/>
-    <p:sldId id="258" r:id="rId13"/>
-    <p:sldId id="264" r:id="rId14"/>
-    <p:sldId id="265" r:id="rId15"/>
-    <p:sldId id="260" r:id="rId16"/>
-    <p:sldId id="263" r:id="rId17"/>
-    <p:sldId id="259" r:id="rId18"/>
-    <p:sldId id="262" r:id="rId19"/>
-    <p:sldId id="266" r:id="rId20"/>
-    <p:sldId id="268" r:id="rId21"/>
-    <p:sldId id="261" r:id="rId22"/>
+    <p:sldId id="278" r:id="rId13"/>
+    <p:sldId id="258" r:id="rId14"/>
+    <p:sldId id="264" r:id="rId15"/>
+    <p:sldId id="265" r:id="rId16"/>
+    <p:sldId id="260" r:id="rId17"/>
+    <p:sldId id="263" r:id="rId18"/>
+    <p:sldId id="259" r:id="rId19"/>
+    <p:sldId id="262" r:id="rId20"/>
+    <p:sldId id="266" r:id="rId21"/>
+    <p:sldId id="268" r:id="rId22"/>
+    <p:sldId id="261" r:id="rId23"/>
   </p:sldIdLst>
   <p:sldSz cx="12192000" cy="6858000"/>
   <p:notesSz cx="6858000" cy="9144000"/>
@@ -633,7 +634,7 @@
           <a:p>
             <a:fld id="{F7021451-1387-4CA6-816F-3879F97B5CBC}" type="slidenum">
               <a:rPr lang="en-US"/>
-              <a:t>20</a:t>
+              <a:t>21</a:t>
             </a:fld>
             <a:endParaRPr lang="en-US"/>
           </a:p>
@@ -1473,7 +1474,7 @@
           <a:p>
             <a:fld id="{87B1ED34-7657-420E-92A0-622A8012543D}" type="slidenum">
               <a:rPr lang="ko-KR" altLang="en-US" smtClean="0"/>
-              <a:t>13</a:t>
+              <a:t>14</a:t>
             </a:fld>
             <a:endParaRPr lang="ko-KR" altLang="en-US"/>
           </a:p>
@@ -7314,12 +7315,327 @@
           </a:p>
         </p:txBody>
       </p:sp>
+      <p:pic>
+        <p:nvPicPr>
+          <p:cNvPr id="3" name="그림 2">
+            <a:extLst>
+              <a:ext uri="{FF2B5EF4-FFF2-40B4-BE49-F238E27FC236}">
+                <a16:creationId xmlns:a16="http://schemas.microsoft.com/office/drawing/2014/main" id="{C551BD9F-7714-6AD7-C959-2EC4B8397388}"/>
+              </a:ext>
+            </a:extLst>
+          </p:cNvPr>
+          <p:cNvPicPr>
+            <a:picLocks noChangeAspect="1"/>
+          </p:cNvPicPr>
+          <p:nvPr/>
+        </p:nvPicPr>
+        <p:blipFill>
+          <a:blip r:embed="rId3"/>
+          <a:stretch>
+            <a:fillRect/>
+          </a:stretch>
+        </p:blipFill>
+        <p:spPr>
+          <a:xfrm>
+            <a:off x="1988000" y="995000"/>
+            <a:ext cx="8216000" cy="5688000"/>
+          </a:xfrm>
+          <a:prstGeom prst="rect">
+            <a:avLst/>
+          </a:prstGeom>
+        </p:spPr>
+      </p:pic>
+      <p:sp>
+        <p:nvSpPr>
+          <p:cNvPr id="910" name="cat_badge"/>
+          <p:cNvSpPr>
+            <a:spLocks noGrp="1"/>
+          </p:cNvSpPr>
+          <p:nvPr/>
+        </p:nvSpPr>
+        <p:spPr>
+          <a:xfrm>
+            <a:off x="320000" y="110000"/>
+            <a:ext cx="1350000" cy="600000"/>
+          </a:xfrm>
+          <a:prstGeom prst="roundRect">
+            <a:avLst>
+              <a:gd name="adj" fmla="val 20000"/>
+            </a:avLst>
+          </a:prstGeom>
+          <a:solidFill>
+            <a:srgbClr val="E05A1A">
+              <a:alpha val="28000"/>
+            </a:srgbClr>
+          </a:solidFill>
+          <a:ln>
+            <a:noFill/>
+          </a:ln>
+        </p:spPr>
+        <p:txBody>
+          <a:bodyPr wrap="square" rtlCol="0" anchor="ctr">
+            <a:noAutofit/>
+          </a:bodyPr>
+          <a:lstStyle/>
+          <a:p>
+            <a:pPr algn="ctr"/>
+            <a:r>
+              <a:rPr lang="ko-KR" altLang="en-US" sz="1400" b="1" dirty="0">
+                <a:solidFill>
+                  <a:srgbClr val="FFBB88"/>
+                </a:solidFill>
+              </a:rPr>
+              <a:t>UI 개요</a:t>
+            </a:r>
+          </a:p>
+        </p:txBody>
+      </p:sp>
+      <p:sp>
+        <p:nvSpPr>
+          <p:cNvPr id="903" name="header_title"/>
+          <p:cNvSpPr txBox="1"/>
+          <p:nvPr/>
+        </p:nvSpPr>
+        <p:spPr>
+          <a:xfrm>
+            <a:off x="1830000" y="0"/>
+            <a:ext cx="9562000" cy="820000"/>
+          </a:xfrm>
+          <a:prstGeom prst="rect">
+            <a:avLst/>
+          </a:prstGeom>
+          <a:noFill/>
+        </p:spPr>
+        <p:txBody>
+          <a:bodyPr wrap="square" rtlCol="0" anchor="ctr">
+            <a:noAutofit/>
+          </a:bodyPr>
+          <a:lstStyle/>
+          <a:p>
+            <a:r>
+              <a:rPr lang="ko-KR" altLang="en-US" sz="2000" b="1" dirty="0">
+                <a:solidFill>
+                  <a:srgbClr val="FFFFFF"/>
+                </a:solidFill>
+              </a:rPr>
+              <a:t>시스템 UI 전체 화면 구성</a:t>
+            </a:r>
+          </a:p>
+        </p:txBody>
+      </p:sp>
+    </p:spTree>
+  </p:cSld>
+  <p:clrMapOvr>
+    <a:masterClrMapping/>
+  </p:clrMapOvr>
+</p:sld>
+</file>
+
+<file path=ppt/slides/slide12.xml><?xml version="1.0" encoding="utf-8"?>
+<p:sld xmlns:a="http://schemas.openxmlformats.org/drawingml/2006/main" xmlns:r="http://schemas.openxmlformats.org/officeDocument/2006/relationships" xmlns:p="http://schemas.openxmlformats.org/presentationml/2006/main">
+  <p:cSld>
+    <p:spTree>
+      <p:nvGrpSpPr>
+        <p:cNvPr id="1" name="">
+          <a:extLst>
+            <a:ext uri="{FF2B5EF4-FFF2-40B4-BE49-F238E27FC236}">
+              <a16:creationId xmlns:a16="http://schemas.microsoft.com/office/drawing/2014/main" id="{B78C0346-2123-704B-93F4-6605971A5395}"/>
+            </a:ext>
+          </a:extLst>
+        </p:cNvPr>
+        <p:cNvGrpSpPr/>
+        <p:nvPr/>
+      </p:nvGrpSpPr>
+      <p:grpSpPr>
+        <a:xfrm>
+          <a:off x="0" y="0"/>
+          <a:ext cx="0" cy="0"/>
+          <a:chOff x="0" y="0"/>
+          <a:chExt cx="0" cy="0"/>
+        </a:xfrm>
+      </p:grpSpPr>
+      <p:sp>
+        <p:nvSpPr>
+          <p:cNvPr id="905" name="content_bg">
+            <a:extLst>
+              <a:ext uri="{FF2B5EF4-FFF2-40B4-BE49-F238E27FC236}">
+                <a16:creationId xmlns:a16="http://schemas.microsoft.com/office/drawing/2014/main" id="{4BECE048-F67D-3125-9E1A-BE47B7062F3C}"/>
+              </a:ext>
+            </a:extLst>
+          </p:cNvPr>
+          <p:cNvSpPr>
+            <a:spLocks noGrp="1"/>
+          </p:cNvSpPr>
+          <p:nvPr/>
+        </p:nvSpPr>
+        <p:spPr>
+          <a:xfrm>
+            <a:off x="0" y="820000"/>
+            <a:ext cx="12192000" cy="6038000"/>
+          </a:xfrm>
+          <a:prstGeom prst="rect">
+            <a:avLst/>
+          </a:prstGeom>
+          <a:solidFill>
+            <a:srgbClr val="EEF1F5"/>
+          </a:solidFill>
+        </p:spPr>
+        <p:txBody>
+          <a:bodyPr/>
+          <a:lstStyle/>
+          <a:p>
+            <a:endParaRPr lang="ko-KR"/>
+          </a:p>
+        </p:txBody>
+      </p:sp>
+      <p:pic>
+        <p:nvPicPr>
+          <p:cNvPr id="8" name="그림 7">
+            <a:extLst>
+              <a:ext uri="{FF2B5EF4-FFF2-40B4-BE49-F238E27FC236}">
+                <a16:creationId xmlns:a16="http://schemas.microsoft.com/office/drawing/2014/main" id="{61208E90-3A75-C97B-C2A3-6B61FE2A6423}"/>
+              </a:ext>
+            </a:extLst>
+          </p:cNvPr>
+          <p:cNvPicPr>
+            <a:picLocks noChangeAspect="1"/>
+          </p:cNvPicPr>
+          <p:nvPr/>
+        </p:nvPicPr>
+        <p:blipFill>
+          <a:blip r:embed="rId2"/>
+          <a:stretch>
+            <a:fillRect/>
+          </a:stretch>
+        </p:blipFill>
+        <p:spPr>
+          <a:xfrm>
+            <a:off x="1988000" y="995000"/>
+            <a:ext cx="8216000" cy="5688000"/>
+          </a:xfrm>
+          <a:prstGeom prst="rect">
+            <a:avLst/>
+          </a:prstGeom>
+        </p:spPr>
+      </p:pic>
+      <p:sp>
+        <p:nvSpPr>
+          <p:cNvPr id="901" name="header_bar">
+            <a:extLst>
+              <a:ext uri="{FF2B5EF4-FFF2-40B4-BE49-F238E27FC236}">
+                <a16:creationId xmlns:a16="http://schemas.microsoft.com/office/drawing/2014/main" id="{7B977652-5896-70EE-8DE3-B188610B06B3}"/>
+              </a:ext>
+            </a:extLst>
+          </p:cNvPr>
+          <p:cNvSpPr>
+            <a:spLocks noGrp="1"/>
+          </p:cNvSpPr>
+          <p:nvPr/>
+        </p:nvSpPr>
+        <p:spPr>
+          <a:xfrm>
+            <a:off x="0" y="0"/>
+            <a:ext cx="12192000" cy="820000"/>
+          </a:xfrm>
+          <a:prstGeom prst="rect">
+            <a:avLst/>
+          </a:prstGeom>
+          <a:solidFill>
+            <a:srgbClr val="1B2A4A"/>
+          </a:solidFill>
+        </p:spPr>
+        <p:txBody>
+          <a:bodyPr/>
+          <a:lstStyle/>
+          <a:p>
+            <a:endParaRPr lang="ko-KR"/>
+          </a:p>
+        </p:txBody>
+      </p:sp>
+      <p:sp>
+        <p:nvSpPr>
+          <p:cNvPr id="902" name="accent_stripe">
+            <a:extLst>
+              <a:ext uri="{FF2B5EF4-FFF2-40B4-BE49-F238E27FC236}">
+                <a16:creationId xmlns:a16="http://schemas.microsoft.com/office/drawing/2014/main" id="{E17DB93A-2355-A6FC-C418-FF3A1C082D89}"/>
+              </a:ext>
+            </a:extLst>
+          </p:cNvPr>
+          <p:cNvSpPr>
+            <a:spLocks noGrp="1"/>
+          </p:cNvSpPr>
+          <p:nvPr/>
+        </p:nvSpPr>
+        <p:spPr>
+          <a:xfrm>
+            <a:off x="0" y="0"/>
+            <a:ext cx="120000" cy="820000"/>
+          </a:xfrm>
+          <a:prstGeom prst="rect">
+            <a:avLst/>
+          </a:prstGeom>
+          <a:solidFill>
+            <a:srgbClr val="E05A1A"/>
+          </a:solidFill>
+        </p:spPr>
+        <p:txBody>
+          <a:bodyPr/>
+          <a:lstStyle/>
+          <a:p>
+            <a:endParaRPr lang="ko-KR"/>
+          </a:p>
+        </p:txBody>
+      </p:sp>
+      <p:sp>
+        <p:nvSpPr>
+          <p:cNvPr id="904" name="step_badge">
+            <a:extLst>
+              <a:ext uri="{FF2B5EF4-FFF2-40B4-BE49-F238E27FC236}">
+                <a16:creationId xmlns:a16="http://schemas.microsoft.com/office/drawing/2014/main" id="{E3F4E38B-CFBF-A7F8-94BD-ED69EBE00252}"/>
+              </a:ext>
+            </a:extLst>
+          </p:cNvPr>
+          <p:cNvSpPr>
+            <a:spLocks noGrp="1"/>
+          </p:cNvSpPr>
+          <p:nvPr/>
+        </p:nvSpPr>
+        <p:spPr>
+          <a:xfrm>
+            <a:off x="11492000" y="0"/>
+            <a:ext cx="700000" cy="820000"/>
+          </a:xfrm>
+          <a:prstGeom prst="rect">
+            <a:avLst/>
+          </a:prstGeom>
+          <a:solidFill>
+            <a:srgbClr val="E05A1A"/>
+          </a:solidFill>
+        </p:spPr>
+        <p:txBody>
+          <a:bodyPr wrap="square" rtlCol="0" anchor="ctr">
+            <a:noAutofit/>
+          </a:bodyPr>
+          <a:lstStyle/>
+          <a:p>
+            <a:pPr algn="ctr"/>
+            <a:r>
+              <a:rPr lang="en-US" sz="2400" b="1" dirty="0">
+                <a:solidFill>
+                  <a:srgbClr val="FFFFFF"/>
+                </a:solidFill>
+              </a:rPr>
+              <a:t>01</a:t>
+            </a:r>
+          </a:p>
+        </p:txBody>
+      </p:sp>
       <p:sp>
         <p:nvSpPr>
           <p:cNvPr id="4" name="직사각형 3">
             <a:extLst>
               <a:ext uri="{FF2B5EF4-FFF2-40B4-BE49-F238E27FC236}">
-                <a16:creationId xmlns:a16="http://schemas.microsoft.com/office/drawing/2014/main" id="{A1B7D557-7DFE-9453-4469-A46C730F98CD}"/>
+                <a16:creationId xmlns:a16="http://schemas.microsoft.com/office/drawing/2014/main" id="{E526D037-D742-7F1A-C4FA-9ABAAC3C77DD}"/>
               </a:ext>
             </a:extLst>
           </p:cNvPr>
@@ -7369,7 +7685,13 @@
       </p:sp>
       <p:sp>
         <p:nvSpPr>
-          <p:cNvPr id="910" name="cat_badge"/>
+          <p:cNvPr id="910" name="cat_badge">
+            <a:extLst>
+              <a:ext uri="{FF2B5EF4-FFF2-40B4-BE49-F238E27FC236}">
+                <a16:creationId xmlns:a16="http://schemas.microsoft.com/office/drawing/2014/main" id="{26633E21-E780-A2FE-F605-CEA18522C95B}"/>
+              </a:ext>
+            </a:extLst>
+          </p:cNvPr>
           <p:cNvSpPr>
             <a:spLocks noGrp="1"/>
           </p:cNvSpPr>
@@ -7402,19 +7724,30 @@
           <a:p>
             <a:pPr algn="ctr"/>
             <a:r>
-              <a:rPr lang="ko-KR" altLang="en-US" sz="1400" b="1" dirty="0">
+              <a:rPr lang="en-US" altLang="ko-KR" sz="1400" b="1" dirty="0">
                 <a:solidFill>
                   <a:srgbClr val="FFBB88"/>
                 </a:solidFill>
               </a:rPr>
-              <a:t>UI 개요</a:t>
+              <a:t>ROI</a:t>
             </a:r>
+            <a:endParaRPr lang="ko-KR" altLang="en-US" sz="1400" b="1" dirty="0">
+              <a:solidFill>
+                <a:srgbClr val="FFBB88"/>
+              </a:solidFill>
+            </a:endParaRPr>
           </a:p>
         </p:txBody>
       </p:sp>
       <p:sp>
         <p:nvSpPr>
-          <p:cNvPr id="903" name="header_title"/>
+          <p:cNvPr id="903" name="header_title">
+            <a:extLst>
+              <a:ext uri="{FF2B5EF4-FFF2-40B4-BE49-F238E27FC236}">
+                <a16:creationId xmlns:a16="http://schemas.microsoft.com/office/drawing/2014/main" id="{3982723D-CFD6-51EF-361F-6D9881E4BBD5}"/>
+              </a:ext>
+            </a:extLst>
+          </p:cNvPr>
           <p:cNvSpPr txBox="1"/>
           <p:nvPr/>
         </p:nvSpPr>
@@ -7435,17 +7768,59 @@
           <a:lstStyle/>
           <a:p>
             <a:r>
+              <a:rPr lang="en-US" altLang="ko-KR" sz="2000" b="1" dirty="0">
+                <a:solidFill>
+                  <a:srgbClr val="FFFFFF"/>
+                </a:solidFill>
+              </a:rPr>
+              <a:t>ROI</a:t>
+            </a:r>
+            <a:r>
               <a:rPr lang="ko-KR" altLang="en-US" sz="2000" b="1" dirty="0">
                 <a:solidFill>
                   <a:srgbClr val="FFFFFF"/>
                 </a:solidFill>
               </a:rPr>
-              <a:t>시스템 UI 전체 화면 구성</a:t>
+              <a:t> 설정</a:t>
             </a:r>
+            <a:r>
+              <a:rPr lang="en-US" altLang="ko-KR" sz="2000" b="1" dirty="0">
+                <a:solidFill>
+                  <a:srgbClr val="FFFFFF"/>
+                </a:solidFill>
+              </a:rPr>
+              <a:t>(5</a:t>
+            </a:r>
+            <a:r>
+              <a:rPr lang="ko-KR" altLang="en-US" sz="2000" b="1" dirty="0">
+                <a:solidFill>
+                  <a:srgbClr val="FFFFFF"/>
+                </a:solidFill>
+              </a:rPr>
+              <a:t>번째 빨간 건반 추천</a:t>
+            </a:r>
+            <a:r>
+              <a:rPr lang="en-US" altLang="ko-KR" sz="2000" b="1" dirty="0">
+                <a:solidFill>
+                  <a:srgbClr val="FFFFFF"/>
+                </a:solidFill>
+              </a:rPr>
+              <a:t>)</a:t>
+            </a:r>
+            <a:endParaRPr lang="ko-KR" altLang="en-US" sz="2000" b="1" dirty="0">
+              <a:solidFill>
+                <a:srgbClr val="FFFFFF"/>
+              </a:solidFill>
+            </a:endParaRPr>
           </a:p>
         </p:txBody>
       </p:sp>
     </p:spTree>
+    <p:extLst>
+      <p:ext uri="{BB962C8B-B14F-4D97-AF65-F5344CB8AC3E}">
+        <p14:creationId xmlns:p14="http://schemas.microsoft.com/office/powerpoint/2010/main" val="3704730200"/>
+      </p:ext>
+    </p:extLst>
   </p:cSld>
   <p:clrMapOvr>
     <a:masterClrMapping/>
@@ -7453,7 +7828,7 @@
 </p:sld>
 </file>
 
-<file path=ppt/slides/slide12.xml><?xml version="1.0" encoding="utf-8"?>
+<file path=ppt/slides/slide13.xml><?xml version="1.0" encoding="utf-8"?>
 <p:sld xmlns:a="http://schemas.openxmlformats.org/drawingml/2006/main" xmlns:r="http://schemas.openxmlformats.org/officeDocument/2006/relationships" xmlns:p="http://schemas.openxmlformats.org/presentationml/2006/main">
   <p:cSld>
     <p:spTree>
@@ -7761,7 +8136,7 @@
 </p:sld>
 </file>
 
-<file path=ppt/slides/slide13.xml><?xml version="1.0" encoding="utf-8"?>
+<file path=ppt/slides/slide14.xml><?xml version="1.0" encoding="utf-8"?>
 <p:sld xmlns:a="http://schemas.openxmlformats.org/drawingml/2006/main" xmlns:r="http://schemas.openxmlformats.org/officeDocument/2006/relationships" xmlns:p="http://schemas.openxmlformats.org/presentationml/2006/main">
   <p:cSld>
     <p:spTree>
@@ -8104,7 +8479,7 @@
 </p:sld>
 </file>
 
-<file path=ppt/slides/slide14.xml><?xml version="1.0" encoding="utf-8"?>
+<file path=ppt/slides/slide15.xml><?xml version="1.0" encoding="utf-8"?>
 <p:sld xmlns:a="http://schemas.openxmlformats.org/drawingml/2006/main" xmlns:r="http://schemas.openxmlformats.org/officeDocument/2006/relationships" xmlns:p="http://schemas.openxmlformats.org/presentationml/2006/main">
   <p:cSld>
     <p:spTree>
@@ -8500,7 +8875,7 @@
 </p:sld>
 </file>
 
-<file path=ppt/slides/slide15.xml><?xml version="1.0" encoding="utf-8"?>
+<file path=ppt/slides/slide16.xml><?xml version="1.0" encoding="utf-8"?>
 <p:sld xmlns:a="http://schemas.openxmlformats.org/drawingml/2006/main" xmlns:r="http://schemas.openxmlformats.org/officeDocument/2006/relationships" xmlns:p="http://schemas.openxmlformats.org/presentationml/2006/main">
   <p:cSld>
     <p:spTree>
@@ -8838,7 +9213,7 @@
 </p:sld>
 </file>
 
-<file path=ppt/slides/slide16.xml><?xml version="1.0" encoding="utf-8"?>
+<file path=ppt/slides/slide17.xml><?xml version="1.0" encoding="utf-8"?>
 <p:sld xmlns:a="http://schemas.openxmlformats.org/drawingml/2006/main" xmlns:r="http://schemas.openxmlformats.org/officeDocument/2006/relationships" xmlns:p="http://schemas.openxmlformats.org/presentationml/2006/main">
   <p:cSld>
     <p:spTree>
@@ -9146,7 +9521,7 @@
 </p:sld>
 </file>
 
-<file path=ppt/slides/slide17.xml><?xml version="1.0" encoding="utf-8"?>
+<file path=ppt/slides/slide18.xml><?xml version="1.0" encoding="utf-8"?>
 <p:sld xmlns:a="http://schemas.openxmlformats.org/drawingml/2006/main" xmlns:r="http://schemas.openxmlformats.org/officeDocument/2006/relationships" xmlns:p="http://schemas.openxmlformats.org/presentationml/2006/main">
   <p:cSld>
     <p:spTree>
@@ -9577,7 +9952,7 @@
 </p:sld>
 </file>
 
-<file path=ppt/slides/slide18.xml><?xml version="1.0" encoding="utf-8"?>
+<file path=ppt/slides/slide19.xml><?xml version="1.0" encoding="utf-8"?>
 <p:sld xmlns:a="http://schemas.openxmlformats.org/drawingml/2006/main" xmlns:r="http://schemas.openxmlformats.org/officeDocument/2006/relationships" xmlns:p="http://schemas.openxmlformats.org/presentationml/2006/main">
   <p:cSld>
     <p:spTree>
@@ -9837,7 +10212,1199 @@
 </p:sld>
 </file>
 
-<file path=ppt/slides/slide19.xml><?xml version="1.0" encoding="utf-8"?>
+<file path=ppt/slides/slide2.xml><?xml version="1.0" encoding="utf-8"?>
+<p:sld xmlns:a="http://schemas.openxmlformats.org/drawingml/2006/main" xmlns:r="http://schemas.openxmlformats.org/officeDocument/2006/relationships" xmlns:p="http://schemas.openxmlformats.org/presentationml/2006/main">
+  <p:cSld>
+    <p:spTree>
+      <p:nvGrpSpPr>
+        <p:cNvPr id="1" name="">
+          <a:extLst>
+            <a:ext uri="{FF2B5EF4-FFF2-40B4-BE49-F238E27FC236}">
+              <a16:creationId xmlns:a16="http://schemas.microsoft.com/office/drawing/2014/main" id="{748D4D7B-CCFC-8D12-7A79-5352B38A3DBD}"/>
+            </a:ext>
+          </a:extLst>
+        </p:cNvPr>
+        <p:cNvGrpSpPr/>
+        <p:nvPr/>
+      </p:nvGrpSpPr>
+      <p:grpSpPr>
+        <a:xfrm>
+          <a:off x="0" y="0"/>
+          <a:ext cx="0" cy="0"/>
+          <a:chOff x="0" y="0"/>
+          <a:chExt cx="0" cy="0"/>
+        </a:xfrm>
+      </p:grpSpPr>
+      <p:sp>
+        <p:nvSpPr>
+          <p:cNvPr id="905" name="content_bg">
+            <a:extLst>
+              <a:ext uri="{FF2B5EF4-FFF2-40B4-BE49-F238E27FC236}">
+                <a16:creationId xmlns:a16="http://schemas.microsoft.com/office/drawing/2014/main" id="{1A7DF3F7-FD19-7171-88C5-1FBD20C2A7CA}"/>
+              </a:ext>
+            </a:extLst>
+          </p:cNvPr>
+          <p:cNvSpPr>
+            <a:spLocks noGrp="1"/>
+          </p:cNvSpPr>
+          <p:nvPr/>
+        </p:nvSpPr>
+        <p:spPr>
+          <a:xfrm>
+            <a:off x="0" y="820000"/>
+            <a:ext cx="12192000" cy="6038000"/>
+          </a:xfrm>
+          <a:prstGeom prst="rect">
+            <a:avLst/>
+          </a:prstGeom>
+          <a:solidFill>
+            <a:srgbClr val="EEF1F5"/>
+          </a:solidFill>
+        </p:spPr>
+        <p:txBody>
+          <a:bodyPr/>
+          <a:lstStyle/>
+          <a:p>
+            <a:endParaRPr lang="ko-KR"/>
+          </a:p>
+        </p:txBody>
+      </p:sp>
+      <p:sp>
+        <p:nvSpPr>
+          <p:cNvPr id="901" name="header_bar">
+            <a:extLst>
+              <a:ext uri="{FF2B5EF4-FFF2-40B4-BE49-F238E27FC236}">
+                <a16:creationId xmlns:a16="http://schemas.microsoft.com/office/drawing/2014/main" id="{ACE7E5DD-B69E-3D87-E561-8F45BD5FAAEE}"/>
+              </a:ext>
+            </a:extLst>
+          </p:cNvPr>
+          <p:cNvSpPr>
+            <a:spLocks noGrp="1"/>
+          </p:cNvSpPr>
+          <p:nvPr/>
+        </p:nvSpPr>
+        <p:spPr>
+          <a:xfrm>
+            <a:off x="0" y="0"/>
+            <a:ext cx="12192000" cy="820000"/>
+          </a:xfrm>
+          <a:prstGeom prst="rect">
+            <a:avLst/>
+          </a:prstGeom>
+          <a:solidFill>
+            <a:srgbClr val="1B2A4A"/>
+          </a:solidFill>
+        </p:spPr>
+        <p:txBody>
+          <a:bodyPr/>
+          <a:lstStyle/>
+          <a:p>
+            <a:endParaRPr lang="ko-KR"/>
+          </a:p>
+        </p:txBody>
+      </p:sp>
+      <p:sp>
+        <p:nvSpPr>
+          <p:cNvPr id="902" name="accent_stripe">
+            <a:extLst>
+              <a:ext uri="{FF2B5EF4-FFF2-40B4-BE49-F238E27FC236}">
+                <a16:creationId xmlns:a16="http://schemas.microsoft.com/office/drawing/2014/main" id="{33D156C9-3AA4-68AE-BFDD-77F69B5AA389}"/>
+              </a:ext>
+            </a:extLst>
+          </p:cNvPr>
+          <p:cNvSpPr>
+            <a:spLocks noGrp="1"/>
+          </p:cNvSpPr>
+          <p:nvPr/>
+        </p:nvSpPr>
+        <p:spPr>
+          <a:xfrm>
+            <a:off x="0" y="0"/>
+            <a:ext cx="120000" cy="820000"/>
+          </a:xfrm>
+          <a:prstGeom prst="rect">
+            <a:avLst/>
+          </a:prstGeom>
+          <a:solidFill>
+            <a:srgbClr val="E05A1A"/>
+          </a:solidFill>
+        </p:spPr>
+        <p:txBody>
+          <a:bodyPr/>
+          <a:lstStyle/>
+          <a:p>
+            <a:endParaRPr lang="ko-KR"/>
+          </a:p>
+        </p:txBody>
+      </p:sp>
+      <p:sp>
+        <p:nvSpPr>
+          <p:cNvPr id="904" name="step_badge">
+            <a:extLst>
+              <a:ext uri="{FF2B5EF4-FFF2-40B4-BE49-F238E27FC236}">
+                <a16:creationId xmlns:a16="http://schemas.microsoft.com/office/drawing/2014/main" id="{FB7BAA9C-F7D1-B55B-17BE-EBAA8411DC5E}"/>
+              </a:ext>
+            </a:extLst>
+          </p:cNvPr>
+          <p:cNvSpPr>
+            <a:spLocks noGrp="1"/>
+          </p:cNvSpPr>
+          <p:nvPr/>
+        </p:nvSpPr>
+        <p:spPr>
+          <a:xfrm>
+            <a:off x="11492000" y="0"/>
+            <a:ext cx="700000" cy="820000"/>
+          </a:xfrm>
+          <a:prstGeom prst="rect">
+            <a:avLst/>
+          </a:prstGeom>
+          <a:solidFill>
+            <a:srgbClr val="E05A1A"/>
+          </a:solidFill>
+        </p:spPr>
+        <p:txBody>
+          <a:bodyPr wrap="square" rtlCol="0" anchor="ctr">
+            <a:noAutofit/>
+          </a:bodyPr>
+          <a:lstStyle/>
+          <a:p>
+            <a:pPr algn="ctr"/>
+            <a:r>
+              <a:rPr lang="en-US" sz="2400" b="1" dirty="0">
+                <a:solidFill>
+                  <a:srgbClr val="FFFFFF"/>
+                </a:solidFill>
+              </a:rPr>
+              <a:t>01</a:t>
+            </a:r>
+          </a:p>
+        </p:txBody>
+      </p:sp>
+      <p:sp>
+        <p:nvSpPr>
+          <p:cNvPr id="910" name="cat_badge">
+            <a:extLst>
+              <a:ext uri="{FF2B5EF4-FFF2-40B4-BE49-F238E27FC236}">
+                <a16:creationId xmlns:a16="http://schemas.microsoft.com/office/drawing/2014/main" id="{EFCC09E3-BCF8-0291-8A5D-7273F080770A}"/>
+              </a:ext>
+            </a:extLst>
+          </p:cNvPr>
+          <p:cNvSpPr>
+            <a:spLocks noGrp="1"/>
+          </p:cNvSpPr>
+          <p:nvPr/>
+        </p:nvSpPr>
+        <p:spPr>
+          <a:xfrm>
+            <a:off x="320000" y="110000"/>
+            <a:ext cx="1350000" cy="600000"/>
+          </a:xfrm>
+          <a:prstGeom prst="roundRect">
+            <a:avLst>
+              <a:gd name="adj" fmla="val 20000"/>
+            </a:avLst>
+          </a:prstGeom>
+          <a:solidFill>
+            <a:srgbClr val="E05A1A">
+              <a:alpha val="28000"/>
+            </a:srgbClr>
+          </a:solidFill>
+          <a:ln>
+            <a:noFill/>
+          </a:ln>
+        </p:spPr>
+        <p:txBody>
+          <a:bodyPr wrap="square" rtlCol="0" anchor="ctr">
+            <a:noAutofit/>
+          </a:bodyPr>
+          <a:lstStyle/>
+          <a:p>
+            <a:pPr algn="ctr"/>
+            <a:r>
+              <a:rPr lang="ko-KR" altLang="en-US" sz="1400" b="1" dirty="0">
+                <a:solidFill>
+                  <a:srgbClr val="FFBB88"/>
+                </a:solidFill>
+              </a:rPr>
+              <a:t>개요</a:t>
+            </a:r>
+          </a:p>
+        </p:txBody>
+      </p:sp>
+      <p:sp>
+        <p:nvSpPr>
+          <p:cNvPr id="903" name="header_title">
+            <a:extLst>
+              <a:ext uri="{FF2B5EF4-FFF2-40B4-BE49-F238E27FC236}">
+                <a16:creationId xmlns:a16="http://schemas.microsoft.com/office/drawing/2014/main" id="{316431B5-7AC5-7FFB-E296-984F94A61EE9}"/>
+              </a:ext>
+            </a:extLst>
+          </p:cNvPr>
+          <p:cNvSpPr txBox="1"/>
+          <p:nvPr/>
+        </p:nvSpPr>
+        <p:spPr>
+          <a:xfrm>
+            <a:off x="1830000" y="0"/>
+            <a:ext cx="9562000" cy="820000"/>
+          </a:xfrm>
+          <a:prstGeom prst="rect">
+            <a:avLst/>
+          </a:prstGeom>
+          <a:noFill/>
+        </p:spPr>
+        <p:txBody>
+          <a:bodyPr wrap="square" rtlCol="0" anchor="ctr">
+            <a:noAutofit/>
+          </a:bodyPr>
+          <a:lstStyle/>
+          <a:p>
+            <a:r>
+              <a:rPr lang="ko-KR" altLang="en-US" sz="2000" b="1" dirty="0">
+                <a:solidFill>
+                  <a:srgbClr val="FFFFFF"/>
+                </a:solidFill>
+              </a:rPr>
+              <a:t>프로젝트 개요</a:t>
+            </a:r>
+          </a:p>
+        </p:txBody>
+      </p:sp>
+      <p:grpSp>
+        <p:nvGrpSpPr>
+          <p:cNvPr id="58" name="그룹 57">
+            <a:extLst>
+              <a:ext uri="{FF2B5EF4-FFF2-40B4-BE49-F238E27FC236}">
+                <a16:creationId xmlns:a16="http://schemas.microsoft.com/office/drawing/2014/main" id="{0FA0B009-9651-5428-AD15-FF6A73F6CE03}"/>
+              </a:ext>
+            </a:extLst>
+          </p:cNvPr>
+          <p:cNvGrpSpPr/>
+          <p:nvPr/>
+        </p:nvGrpSpPr>
+        <p:grpSpPr>
+          <a:xfrm>
+            <a:off x="433190" y="1218050"/>
+            <a:ext cx="11325620" cy="5389784"/>
+            <a:chOff x="320040" y="1097280"/>
+            <a:chExt cx="8549640" cy="3867912"/>
+          </a:xfrm>
+        </p:grpSpPr>
+        <p:sp>
+          <p:nvSpPr>
+            <p:cNvPr id="40" name="Shape 3">
+              <a:extLst>
+                <a:ext uri="{FF2B5EF4-FFF2-40B4-BE49-F238E27FC236}">
+                  <a16:creationId xmlns:a16="http://schemas.microsoft.com/office/drawing/2014/main" id="{09C1A38E-04CD-B530-6107-A13FF60823FE}"/>
+                </a:ext>
+              </a:extLst>
+            </p:cNvPr>
+            <p:cNvSpPr/>
+            <p:nvPr/>
+          </p:nvSpPr>
+          <p:spPr>
+            <a:xfrm>
+              <a:off x="320040" y="1097280"/>
+              <a:ext cx="4114800" cy="1554480"/>
+            </a:xfrm>
+            <a:prstGeom prst="rect">
+              <a:avLst/>
+            </a:prstGeom>
+            <a:solidFill>
+              <a:srgbClr val="FFFFFF"/>
+            </a:solidFill>
+            <a:ln w="12700">
+              <a:solidFill>
+                <a:srgbClr val="D0D8EC"/>
+              </a:solidFill>
+              <a:prstDash val="solid"/>
+            </a:ln>
+            <a:effectLst>
+              <a:outerShdw blurRad="101600" dist="38100" dir="8100000" algn="bl" rotWithShape="0">
+                <a:srgbClr val="000000">
+                  <a:alpha val="18000"/>
+                </a:srgbClr>
+              </a:outerShdw>
+            </a:effectLst>
+          </p:spPr>
+          <p:txBody>
+            <a:bodyPr/>
+            <a:lstStyle/>
+            <a:p>
+              <a:endParaRPr lang="ko-KR" altLang="en-US"/>
+            </a:p>
+          </p:txBody>
+        </p:sp>
+        <p:sp>
+          <p:nvSpPr>
+            <p:cNvPr id="41" name="Shape 4">
+              <a:extLst>
+                <a:ext uri="{FF2B5EF4-FFF2-40B4-BE49-F238E27FC236}">
+                  <a16:creationId xmlns:a16="http://schemas.microsoft.com/office/drawing/2014/main" id="{8AA5E232-DA9B-7428-06FF-EE5E1390CF4B}"/>
+                </a:ext>
+              </a:extLst>
+            </p:cNvPr>
+            <p:cNvSpPr/>
+            <p:nvPr/>
+          </p:nvSpPr>
+          <p:spPr>
+            <a:xfrm>
+              <a:off x="320040" y="1097280"/>
+              <a:ext cx="54864" cy="1554480"/>
+            </a:xfrm>
+            <a:prstGeom prst="rect">
+              <a:avLst/>
+            </a:prstGeom>
+            <a:solidFill>
+              <a:srgbClr val="E05A1A"/>
+            </a:solidFill>
+            <a:ln w="12700">
+              <a:solidFill>
+                <a:srgbClr val="E05A1A"/>
+              </a:solidFill>
+              <a:prstDash val="solid"/>
+            </a:ln>
+          </p:spPr>
+          <p:txBody>
+            <a:bodyPr/>
+            <a:lstStyle/>
+            <a:p>
+              <a:endParaRPr lang="ko-KR" altLang="en-US"/>
+            </a:p>
+          </p:txBody>
+        </p:sp>
+        <p:sp>
+          <p:nvSpPr>
+            <p:cNvPr id="42" name="Text 5">
+              <a:extLst>
+                <a:ext uri="{FF2B5EF4-FFF2-40B4-BE49-F238E27FC236}">
+                  <a16:creationId xmlns:a16="http://schemas.microsoft.com/office/drawing/2014/main" id="{B5ACDA61-0ACF-DE7B-1481-747ACAA652EB}"/>
+                </a:ext>
+              </a:extLst>
+            </p:cNvPr>
+            <p:cNvSpPr/>
+            <p:nvPr/>
+          </p:nvSpPr>
+          <p:spPr>
+            <a:xfrm>
+              <a:off x="457200" y="1207008"/>
+              <a:ext cx="3840480" cy="347472"/>
+            </a:xfrm>
+            <a:prstGeom prst="rect">
+              <a:avLst/>
+            </a:prstGeom>
+            <a:noFill/>
+            <a:ln/>
+          </p:spPr>
+          <p:txBody>
+            <a:bodyPr wrap="square" lIns="0" tIns="0" rIns="0" bIns="0" rtlCol="0" anchor="ctr"/>
+            <a:lstStyle/>
+            <a:p>
+              <a:pPr marL="0" indent="0">
+                <a:buNone/>
+              </a:pPr>
+              <a:r>
+                <a:rPr lang="en-US" sz="1600" b="1" dirty="0">
+                  <a:solidFill>
+                    <a:srgbClr val="1B2A4A"/>
+                  </a:solidFill>
+                </a:rPr>
+                <a:t>🎹  검사 대상</a:t>
+              </a:r>
+              <a:endParaRPr lang="en-US" dirty="0"/>
+            </a:p>
+          </p:txBody>
+        </p:sp>
+        <p:sp>
+          <p:nvSpPr>
+            <p:cNvPr id="43" name="Text 6">
+              <a:extLst>
+                <a:ext uri="{FF2B5EF4-FFF2-40B4-BE49-F238E27FC236}">
+                  <a16:creationId xmlns:a16="http://schemas.microsoft.com/office/drawing/2014/main" id="{784D9AFA-CBC0-129F-F0CE-15941D785DB6}"/>
+                </a:ext>
+              </a:extLst>
+            </p:cNvPr>
+            <p:cNvSpPr/>
+            <p:nvPr/>
+          </p:nvSpPr>
+          <p:spPr>
+            <a:xfrm>
+              <a:off x="457200" y="1609344"/>
+              <a:ext cx="3840480" cy="914400"/>
+            </a:xfrm>
+            <a:prstGeom prst="rect">
+              <a:avLst/>
+            </a:prstGeom>
+            <a:noFill/>
+            <a:ln/>
+          </p:spPr>
+          <p:txBody>
+            <a:bodyPr wrap="square" lIns="0" tIns="0" rIns="0" bIns="0" rtlCol="0" anchor="ctr"/>
+            <a:lstStyle/>
+            <a:p>
+              <a:pPr marL="0" indent="0">
+                <a:lnSpc>
+                  <a:spcPct val="130000"/>
+                </a:lnSpc>
+                <a:buNone/>
+              </a:pPr>
+              <a:r>
+                <a:rPr lang="en-US" sz="1400" dirty="0" err="1">
+                  <a:solidFill>
+                    <a:srgbClr val="3A4A6B"/>
+                  </a:solidFill>
+                </a:rPr>
+                <a:t>실로폰</a:t>
+              </a:r>
+              <a:r>
+                <a:rPr lang="en-US" sz="1400" dirty="0">
+                  <a:solidFill>
+                    <a:srgbClr val="3A4A6B"/>
+                  </a:solidFill>
+                </a:rPr>
+                <a:t> 건반 부품</a:t>
+              </a:r>
+              <a:endParaRPr lang="en-US" dirty="0"/>
+            </a:p>
+            <a:p>
+              <a:pPr marL="0" indent="0">
+                <a:lnSpc>
+                  <a:spcPct val="130000"/>
+                </a:lnSpc>
+                <a:buNone/>
+              </a:pPr>
+              <a:r>
+                <a:rPr lang="en-US" sz="1400" dirty="0">
+                  <a:solidFill>
+                    <a:srgbClr val="3A4A6B"/>
+                  </a:solidFill>
+                </a:rPr>
+                <a:t>볼트 체결 상태 + 각인(Mark) </a:t>
+              </a:r>
+              <a:r>
+                <a:rPr lang="ko-KR" altLang="en-US" sz="1400" dirty="0">
+                  <a:solidFill>
+                    <a:srgbClr val="3A4A6B"/>
+                  </a:solidFill>
+                </a:rPr>
+                <a:t>유무</a:t>
+              </a:r>
+              <a:r>
+                <a:rPr lang="en-US" sz="1400" dirty="0">
+                  <a:solidFill>
+                    <a:srgbClr val="3A4A6B"/>
+                  </a:solidFill>
+                </a:rPr>
+                <a:t> 자동 판정</a:t>
+              </a:r>
+              <a:endParaRPr lang="en-US" dirty="0"/>
+            </a:p>
+          </p:txBody>
+        </p:sp>
+        <p:sp>
+          <p:nvSpPr>
+            <p:cNvPr id="44" name="Shape 7">
+              <a:extLst>
+                <a:ext uri="{FF2B5EF4-FFF2-40B4-BE49-F238E27FC236}">
+                  <a16:creationId xmlns:a16="http://schemas.microsoft.com/office/drawing/2014/main" id="{D00EA473-3C01-16B6-BC8C-9598C77E91AB}"/>
+                </a:ext>
+              </a:extLst>
+            </p:cNvPr>
+            <p:cNvSpPr/>
+            <p:nvPr/>
+          </p:nvSpPr>
+          <p:spPr>
+            <a:xfrm>
+              <a:off x="4754880" y="1097280"/>
+              <a:ext cx="4114800" cy="1554480"/>
+            </a:xfrm>
+            <a:prstGeom prst="rect">
+              <a:avLst/>
+            </a:prstGeom>
+            <a:solidFill>
+              <a:srgbClr val="FFFFFF"/>
+            </a:solidFill>
+            <a:ln w="12700">
+              <a:solidFill>
+                <a:srgbClr val="D0D8EC"/>
+              </a:solidFill>
+              <a:prstDash val="solid"/>
+            </a:ln>
+            <a:effectLst>
+              <a:outerShdw blurRad="101600" dist="38100" dir="8100000" algn="bl" rotWithShape="0">
+                <a:srgbClr val="000000">
+                  <a:alpha val="18000"/>
+                </a:srgbClr>
+              </a:outerShdw>
+            </a:effectLst>
+          </p:spPr>
+          <p:txBody>
+            <a:bodyPr/>
+            <a:lstStyle/>
+            <a:p>
+              <a:endParaRPr lang="ko-KR" altLang="en-US"/>
+            </a:p>
+          </p:txBody>
+        </p:sp>
+        <p:sp>
+          <p:nvSpPr>
+            <p:cNvPr id="45" name="Shape 8">
+              <a:extLst>
+                <a:ext uri="{FF2B5EF4-FFF2-40B4-BE49-F238E27FC236}">
+                  <a16:creationId xmlns:a16="http://schemas.microsoft.com/office/drawing/2014/main" id="{5D837131-F3EB-CEC9-E953-596D533150C2}"/>
+                </a:ext>
+              </a:extLst>
+            </p:cNvPr>
+            <p:cNvSpPr/>
+            <p:nvPr/>
+          </p:nvSpPr>
+          <p:spPr>
+            <a:xfrm>
+              <a:off x="4754880" y="1097280"/>
+              <a:ext cx="54864" cy="1554480"/>
+            </a:xfrm>
+            <a:prstGeom prst="rect">
+              <a:avLst/>
+            </a:prstGeom>
+            <a:solidFill>
+              <a:srgbClr val="E05A1A"/>
+            </a:solidFill>
+            <a:ln w="12700">
+              <a:solidFill>
+                <a:srgbClr val="E05A1A"/>
+              </a:solidFill>
+              <a:prstDash val="solid"/>
+            </a:ln>
+          </p:spPr>
+          <p:txBody>
+            <a:bodyPr/>
+            <a:lstStyle/>
+            <a:p>
+              <a:endParaRPr lang="ko-KR" altLang="en-US"/>
+            </a:p>
+          </p:txBody>
+        </p:sp>
+        <p:sp>
+          <p:nvSpPr>
+            <p:cNvPr id="46" name="Text 9">
+              <a:extLst>
+                <a:ext uri="{FF2B5EF4-FFF2-40B4-BE49-F238E27FC236}">
+                  <a16:creationId xmlns:a16="http://schemas.microsoft.com/office/drawing/2014/main" id="{BE23CE6E-1E98-5FF0-FDC8-1C35AA4E98B5}"/>
+                </a:ext>
+              </a:extLst>
+            </p:cNvPr>
+            <p:cNvSpPr/>
+            <p:nvPr/>
+          </p:nvSpPr>
+          <p:spPr>
+            <a:xfrm>
+              <a:off x="4892040" y="1207008"/>
+              <a:ext cx="3840480" cy="347472"/>
+            </a:xfrm>
+            <a:prstGeom prst="rect">
+              <a:avLst/>
+            </a:prstGeom>
+            <a:noFill/>
+            <a:ln/>
+          </p:spPr>
+          <p:txBody>
+            <a:bodyPr wrap="square" lIns="0" tIns="0" rIns="0" bIns="0" rtlCol="0" anchor="ctr"/>
+            <a:lstStyle/>
+            <a:p>
+              <a:pPr marL="0" indent="0">
+                <a:buNone/>
+              </a:pPr>
+              <a:r>
+                <a:rPr lang="en-US" sz="1600" b="1" dirty="0">
+                  <a:solidFill>
+                    <a:srgbClr val="1B2A4A"/>
+                  </a:solidFill>
+                </a:rPr>
+                <a:t>📷  영상 취득</a:t>
+              </a:r>
+              <a:endParaRPr lang="en-US" dirty="0"/>
+            </a:p>
+          </p:txBody>
+        </p:sp>
+        <p:sp>
+          <p:nvSpPr>
+            <p:cNvPr id="47" name="Text 10">
+              <a:extLst>
+                <a:ext uri="{FF2B5EF4-FFF2-40B4-BE49-F238E27FC236}">
+                  <a16:creationId xmlns:a16="http://schemas.microsoft.com/office/drawing/2014/main" id="{5F76ECB1-99DF-B884-5755-87C6D1C8508B}"/>
+                </a:ext>
+              </a:extLst>
+            </p:cNvPr>
+            <p:cNvSpPr/>
+            <p:nvPr/>
+          </p:nvSpPr>
+          <p:spPr>
+            <a:xfrm>
+              <a:off x="4892040" y="1609344"/>
+              <a:ext cx="3840480" cy="914400"/>
+            </a:xfrm>
+            <a:prstGeom prst="rect">
+              <a:avLst/>
+            </a:prstGeom>
+            <a:noFill/>
+            <a:ln/>
+          </p:spPr>
+          <p:txBody>
+            <a:bodyPr wrap="square" lIns="0" tIns="0" rIns="0" bIns="0" rtlCol="0" anchor="ctr"/>
+            <a:lstStyle/>
+            <a:p>
+              <a:pPr marL="0" indent="0">
+                <a:lnSpc>
+                  <a:spcPct val="130000"/>
+                </a:lnSpc>
+                <a:buNone/>
+              </a:pPr>
+              <a:r>
+                <a:rPr lang="en-US" sz="1400" dirty="0">
+                  <a:solidFill>
+                    <a:srgbClr val="3A4A6B"/>
+                  </a:solidFill>
+                </a:rPr>
+                <a:t>실시간 카메라 (WebCam / HikRobot)</a:t>
+              </a:r>
+              <a:endParaRPr lang="en-US" dirty="0"/>
+            </a:p>
+            <a:p>
+              <a:pPr marL="0" indent="0">
+                <a:lnSpc>
+                  <a:spcPct val="130000"/>
+                </a:lnSpc>
+                <a:buNone/>
+              </a:pPr>
+              <a:r>
+                <a:rPr lang="en-US" sz="1400" dirty="0">
+                  <a:solidFill>
+                    <a:srgbClr val="3A4A6B"/>
+                  </a:solidFill>
+                </a:rPr>
+                <a:t>가상 그랩 (폴더 이미지 시뮬레이션)</a:t>
+              </a:r>
+              <a:endParaRPr lang="en-US" dirty="0"/>
+            </a:p>
+          </p:txBody>
+        </p:sp>
+        <p:sp>
+          <p:nvSpPr>
+            <p:cNvPr id="48" name="Shape 11">
+              <a:extLst>
+                <a:ext uri="{FF2B5EF4-FFF2-40B4-BE49-F238E27FC236}">
+                  <a16:creationId xmlns:a16="http://schemas.microsoft.com/office/drawing/2014/main" id="{095EBC33-94DF-3ED7-722D-E0EE9401C634}"/>
+                </a:ext>
+              </a:extLst>
+            </p:cNvPr>
+            <p:cNvSpPr/>
+            <p:nvPr/>
+          </p:nvSpPr>
+          <p:spPr>
+            <a:xfrm>
+              <a:off x="320040" y="2880360"/>
+              <a:ext cx="4114800" cy="1554480"/>
+            </a:xfrm>
+            <a:prstGeom prst="rect">
+              <a:avLst/>
+            </a:prstGeom>
+            <a:solidFill>
+              <a:srgbClr val="FFFFFF"/>
+            </a:solidFill>
+            <a:ln w="12700">
+              <a:solidFill>
+                <a:srgbClr val="D0D8EC"/>
+              </a:solidFill>
+              <a:prstDash val="solid"/>
+            </a:ln>
+            <a:effectLst>
+              <a:outerShdw blurRad="101600" dist="38100" dir="8100000" algn="bl" rotWithShape="0">
+                <a:srgbClr val="000000">
+                  <a:alpha val="18000"/>
+                </a:srgbClr>
+              </a:outerShdw>
+            </a:effectLst>
+          </p:spPr>
+          <p:txBody>
+            <a:bodyPr/>
+            <a:lstStyle/>
+            <a:p>
+              <a:endParaRPr lang="ko-KR" altLang="en-US"/>
+            </a:p>
+          </p:txBody>
+        </p:sp>
+        <p:sp>
+          <p:nvSpPr>
+            <p:cNvPr id="49" name="Shape 12">
+              <a:extLst>
+                <a:ext uri="{FF2B5EF4-FFF2-40B4-BE49-F238E27FC236}">
+                  <a16:creationId xmlns:a16="http://schemas.microsoft.com/office/drawing/2014/main" id="{CB7CB110-7F1A-386D-F8F8-DE0E22F67979}"/>
+                </a:ext>
+              </a:extLst>
+            </p:cNvPr>
+            <p:cNvSpPr/>
+            <p:nvPr/>
+          </p:nvSpPr>
+          <p:spPr>
+            <a:xfrm>
+              <a:off x="320040" y="2880360"/>
+              <a:ext cx="54864" cy="1554480"/>
+            </a:xfrm>
+            <a:prstGeom prst="rect">
+              <a:avLst/>
+            </a:prstGeom>
+            <a:solidFill>
+              <a:srgbClr val="E05A1A"/>
+            </a:solidFill>
+            <a:ln w="12700">
+              <a:solidFill>
+                <a:srgbClr val="E05A1A"/>
+              </a:solidFill>
+              <a:prstDash val="solid"/>
+            </a:ln>
+          </p:spPr>
+          <p:txBody>
+            <a:bodyPr/>
+            <a:lstStyle/>
+            <a:p>
+              <a:endParaRPr lang="ko-KR" altLang="en-US"/>
+            </a:p>
+          </p:txBody>
+        </p:sp>
+        <p:sp>
+          <p:nvSpPr>
+            <p:cNvPr id="50" name="Text 13">
+              <a:extLst>
+                <a:ext uri="{FF2B5EF4-FFF2-40B4-BE49-F238E27FC236}">
+                  <a16:creationId xmlns:a16="http://schemas.microsoft.com/office/drawing/2014/main" id="{C0F33324-CC22-0C1D-ADAB-475DDCF416D7}"/>
+                </a:ext>
+              </a:extLst>
+            </p:cNvPr>
+            <p:cNvSpPr/>
+            <p:nvPr/>
+          </p:nvSpPr>
+          <p:spPr>
+            <a:xfrm>
+              <a:off x="457200" y="2990088"/>
+              <a:ext cx="3840480" cy="347472"/>
+            </a:xfrm>
+            <a:prstGeom prst="rect">
+              <a:avLst/>
+            </a:prstGeom>
+            <a:noFill/>
+            <a:ln/>
+          </p:spPr>
+          <p:txBody>
+            <a:bodyPr wrap="square" lIns="0" tIns="0" rIns="0" bIns="0" rtlCol="0" anchor="ctr"/>
+            <a:lstStyle/>
+            <a:p>
+              <a:pPr marL="0" indent="0">
+                <a:buNone/>
+              </a:pPr>
+              <a:r>
+                <a:rPr lang="en-US" sz="1600" b="1" dirty="0">
+                  <a:solidFill>
+                    <a:srgbClr val="1B2A4A"/>
+                  </a:solidFill>
+                </a:rPr>
+                <a:t>⚙️  핵심 기술</a:t>
+              </a:r>
+              <a:endParaRPr lang="en-US" dirty="0"/>
+            </a:p>
+          </p:txBody>
+        </p:sp>
+        <p:sp>
+          <p:nvSpPr>
+            <p:cNvPr id="51" name="Text 14">
+              <a:extLst>
+                <a:ext uri="{FF2B5EF4-FFF2-40B4-BE49-F238E27FC236}">
+                  <a16:creationId xmlns:a16="http://schemas.microsoft.com/office/drawing/2014/main" id="{BE656C4A-6801-CB26-84E3-BAE77F4480FB}"/>
+                </a:ext>
+              </a:extLst>
+            </p:cNvPr>
+            <p:cNvSpPr/>
+            <p:nvPr/>
+          </p:nvSpPr>
+          <p:spPr>
+            <a:xfrm>
+              <a:off x="457200" y="3392424"/>
+              <a:ext cx="3840480" cy="914400"/>
+            </a:xfrm>
+            <a:prstGeom prst="rect">
+              <a:avLst/>
+            </a:prstGeom>
+            <a:noFill/>
+            <a:ln/>
+          </p:spPr>
+          <p:txBody>
+            <a:bodyPr wrap="square" lIns="0" tIns="0" rIns="0" bIns="0" rtlCol="0" anchor="ctr"/>
+            <a:lstStyle/>
+            <a:p>
+              <a:pPr marL="0" indent="0">
+                <a:lnSpc>
+                  <a:spcPct val="130000"/>
+                </a:lnSpc>
+                <a:buNone/>
+              </a:pPr>
+              <a:r>
+                <a:rPr lang="en-US" sz="1400" dirty="0">
+                  <a:solidFill>
+                    <a:srgbClr val="3A4A6B"/>
+                  </a:solidFill>
+                </a:rPr>
+                <a:t>OpenCvSharp 기반 Computer Vision</a:t>
+              </a:r>
+              <a:endParaRPr lang="en-US" dirty="0"/>
+            </a:p>
+            <a:p>
+              <a:pPr marL="0" indent="0">
+                <a:lnSpc>
+                  <a:spcPct val="130000"/>
+                </a:lnSpc>
+                <a:buNone/>
+              </a:pPr>
+              <a:r>
+                <a:rPr lang="en-US" sz="1400" dirty="0">
+                  <a:solidFill>
+                    <a:srgbClr val="3A4A6B"/>
+                  </a:solidFill>
+                </a:rPr>
+                <a:t>C# 멀티스레딩 / BlockingCollection 큐</a:t>
+              </a:r>
+              <a:endParaRPr lang="en-US" dirty="0"/>
+            </a:p>
+          </p:txBody>
+        </p:sp>
+        <p:sp>
+          <p:nvSpPr>
+            <p:cNvPr id="52" name="Shape 15">
+              <a:extLst>
+                <a:ext uri="{FF2B5EF4-FFF2-40B4-BE49-F238E27FC236}">
+                  <a16:creationId xmlns:a16="http://schemas.microsoft.com/office/drawing/2014/main" id="{9EFC4709-BFB2-83E8-0FF8-81B2B762BCA4}"/>
+                </a:ext>
+              </a:extLst>
+            </p:cNvPr>
+            <p:cNvSpPr/>
+            <p:nvPr/>
+          </p:nvSpPr>
+          <p:spPr>
+            <a:xfrm>
+              <a:off x="4754880" y="2880360"/>
+              <a:ext cx="4114800" cy="1554480"/>
+            </a:xfrm>
+            <a:prstGeom prst="rect">
+              <a:avLst/>
+            </a:prstGeom>
+            <a:solidFill>
+              <a:srgbClr val="FFFFFF"/>
+            </a:solidFill>
+            <a:ln w="12700">
+              <a:solidFill>
+                <a:srgbClr val="D0D8EC"/>
+              </a:solidFill>
+              <a:prstDash val="solid"/>
+            </a:ln>
+            <a:effectLst>
+              <a:outerShdw blurRad="101600" dist="38100" dir="8100000" algn="bl" rotWithShape="0">
+                <a:srgbClr val="000000">
+                  <a:alpha val="18000"/>
+                </a:srgbClr>
+              </a:outerShdw>
+            </a:effectLst>
+          </p:spPr>
+          <p:txBody>
+            <a:bodyPr/>
+            <a:lstStyle/>
+            <a:p>
+              <a:endParaRPr lang="ko-KR" altLang="en-US"/>
+            </a:p>
+          </p:txBody>
+        </p:sp>
+        <p:sp>
+          <p:nvSpPr>
+            <p:cNvPr id="53" name="Shape 16">
+              <a:extLst>
+                <a:ext uri="{FF2B5EF4-FFF2-40B4-BE49-F238E27FC236}">
+                  <a16:creationId xmlns:a16="http://schemas.microsoft.com/office/drawing/2014/main" id="{1330D2DE-A835-BE3E-FCE4-58725E252641}"/>
+                </a:ext>
+              </a:extLst>
+            </p:cNvPr>
+            <p:cNvSpPr/>
+            <p:nvPr/>
+          </p:nvSpPr>
+          <p:spPr>
+            <a:xfrm>
+              <a:off x="4754880" y="2880360"/>
+              <a:ext cx="54864" cy="1554480"/>
+            </a:xfrm>
+            <a:prstGeom prst="rect">
+              <a:avLst/>
+            </a:prstGeom>
+            <a:solidFill>
+              <a:srgbClr val="E05A1A"/>
+            </a:solidFill>
+            <a:ln w="12700">
+              <a:solidFill>
+                <a:srgbClr val="E05A1A"/>
+              </a:solidFill>
+              <a:prstDash val="solid"/>
+            </a:ln>
+          </p:spPr>
+          <p:txBody>
+            <a:bodyPr/>
+            <a:lstStyle/>
+            <a:p>
+              <a:endParaRPr lang="ko-KR" altLang="en-US"/>
+            </a:p>
+          </p:txBody>
+        </p:sp>
+        <p:sp>
+          <p:nvSpPr>
+            <p:cNvPr id="54" name="Text 17">
+              <a:extLst>
+                <a:ext uri="{FF2B5EF4-FFF2-40B4-BE49-F238E27FC236}">
+                  <a16:creationId xmlns:a16="http://schemas.microsoft.com/office/drawing/2014/main" id="{B8D550C7-B4B4-7E53-C940-4A59D4AA936A}"/>
+                </a:ext>
+              </a:extLst>
+            </p:cNvPr>
+            <p:cNvSpPr/>
+            <p:nvPr/>
+          </p:nvSpPr>
+          <p:spPr>
+            <a:xfrm>
+              <a:off x="4892040" y="2990088"/>
+              <a:ext cx="3840480" cy="347472"/>
+            </a:xfrm>
+            <a:prstGeom prst="rect">
+              <a:avLst/>
+            </a:prstGeom>
+            <a:noFill/>
+            <a:ln/>
+          </p:spPr>
+          <p:txBody>
+            <a:bodyPr wrap="square" lIns="0" tIns="0" rIns="0" bIns="0" rtlCol="0" anchor="ctr"/>
+            <a:lstStyle/>
+            <a:p>
+              <a:pPr marL="0" indent="0">
+                <a:buNone/>
+              </a:pPr>
+              <a:r>
+                <a:rPr lang="en-US" sz="1600" b="1" dirty="0">
+                  <a:solidFill>
+                    <a:srgbClr val="1B2A4A"/>
+                  </a:solidFill>
+                </a:rPr>
+                <a:t>💾  결과 처리</a:t>
+              </a:r>
+              <a:endParaRPr lang="en-US" dirty="0"/>
+            </a:p>
+          </p:txBody>
+        </p:sp>
+        <p:sp>
+          <p:nvSpPr>
+            <p:cNvPr id="55" name="Text 18">
+              <a:extLst>
+                <a:ext uri="{FF2B5EF4-FFF2-40B4-BE49-F238E27FC236}">
+                  <a16:creationId xmlns:a16="http://schemas.microsoft.com/office/drawing/2014/main" id="{895672BA-A5D5-80D0-5CD6-952B30CD7EDE}"/>
+                </a:ext>
+              </a:extLst>
+            </p:cNvPr>
+            <p:cNvSpPr/>
+            <p:nvPr/>
+          </p:nvSpPr>
+          <p:spPr>
+            <a:xfrm>
+              <a:off x="4892040" y="3392424"/>
+              <a:ext cx="3840480" cy="914400"/>
+            </a:xfrm>
+            <a:prstGeom prst="rect">
+              <a:avLst/>
+            </a:prstGeom>
+            <a:noFill/>
+            <a:ln/>
+          </p:spPr>
+          <p:txBody>
+            <a:bodyPr wrap="square" lIns="0" tIns="0" rIns="0" bIns="0" rtlCol="0" anchor="ctr"/>
+            <a:lstStyle/>
+            <a:p>
+              <a:pPr marL="0" indent="0">
+                <a:lnSpc>
+                  <a:spcPct val="130000"/>
+                </a:lnSpc>
+                <a:buNone/>
+              </a:pPr>
+              <a:r>
+                <a:rPr lang="en-US" sz="1400" dirty="0">
+                  <a:solidFill>
+                    <a:srgbClr val="3A4A6B"/>
+                  </a:solidFill>
+                </a:rPr>
+                <a:t>OK / NG-BOLT / NG-MARK 폴더 자동 분류</a:t>
+              </a:r>
+              <a:endParaRPr lang="en-US" dirty="0"/>
+            </a:p>
+            <a:p>
+              <a:pPr marL="0" indent="0">
+                <a:lnSpc>
+                  <a:spcPct val="130000"/>
+                </a:lnSpc>
+                <a:buNone/>
+              </a:pPr>
+              <a:r>
+                <a:rPr lang="en-US" sz="1400" dirty="0">
+                  <a:solidFill>
+                    <a:srgbClr val="3A4A6B"/>
+                  </a:solidFill>
+                </a:rPr>
+                <a:t>비동기 이미지 저장 (별도 전용 </a:t>
+              </a:r>
+              <a:r>
+                <a:rPr lang="en-US" sz="1400" dirty="0" err="1">
+                  <a:solidFill>
+                    <a:srgbClr val="3A4A6B"/>
+                  </a:solidFill>
+                </a:rPr>
+                <a:t>스레드</a:t>
+              </a:r>
+              <a:r>
+                <a:rPr lang="en-US" sz="1400" dirty="0">
+                  <a:solidFill>
+                    <a:srgbClr val="3A4A6B"/>
+                  </a:solidFill>
+                </a:rPr>
+                <a:t>)</a:t>
+              </a:r>
+            </a:p>
+            <a:p>
+              <a:pPr marL="0" indent="0">
+                <a:lnSpc>
+                  <a:spcPct val="130000"/>
+                </a:lnSpc>
+                <a:buNone/>
+              </a:pPr>
+              <a:r>
+                <a:rPr lang="en-US" sz="1400" dirty="0" err="1">
+                  <a:solidFill>
+                    <a:srgbClr val="3A4A6B"/>
+                  </a:solidFill>
+                </a:rPr>
+                <a:t>Log.cvs</a:t>
+              </a:r>
+              <a:r>
+                <a:rPr lang="ko-KR" altLang="en-US" sz="1400" dirty="0">
+                  <a:solidFill>
+                    <a:srgbClr val="3A4A6B"/>
+                  </a:solidFill>
+                </a:rPr>
+                <a:t> 파일 생성</a:t>
+              </a:r>
+              <a:endParaRPr lang="en-US" dirty="0"/>
+            </a:p>
+          </p:txBody>
+        </p:sp>
+        <p:sp>
+          <p:nvSpPr>
+            <p:cNvPr id="56" name="Shape 19">
+              <a:extLst>
+                <a:ext uri="{FF2B5EF4-FFF2-40B4-BE49-F238E27FC236}">
+                  <a16:creationId xmlns:a16="http://schemas.microsoft.com/office/drawing/2014/main" id="{B70D33B1-5E52-36FE-EEA4-95CE9D5DDF69}"/>
+                </a:ext>
+              </a:extLst>
+            </p:cNvPr>
+            <p:cNvSpPr/>
+            <p:nvPr/>
+          </p:nvSpPr>
+          <p:spPr>
+            <a:xfrm>
+              <a:off x="320040" y="4617720"/>
+              <a:ext cx="8503920" cy="347472"/>
+            </a:xfrm>
+            <a:prstGeom prst="rect">
+              <a:avLst/>
+            </a:prstGeom>
+            <a:solidFill>
+              <a:srgbClr val="1B2A4A"/>
+            </a:solidFill>
+            <a:ln w="12700">
+              <a:solidFill>
+                <a:srgbClr val="1B2A4A"/>
+              </a:solidFill>
+              <a:prstDash val="solid"/>
+            </a:ln>
+            <a:effectLst>
+              <a:outerShdw blurRad="101600" dist="38100" dir="8100000" algn="bl" rotWithShape="0">
+                <a:srgbClr val="000000">
+                  <a:alpha val="18000"/>
+                </a:srgbClr>
+              </a:outerShdw>
+            </a:effectLst>
+          </p:spPr>
+          <p:txBody>
+            <a:bodyPr/>
+            <a:lstStyle/>
+            <a:p>
+              <a:endParaRPr lang="ko-KR" altLang="en-US" sz="1400" dirty="0"/>
+            </a:p>
+          </p:txBody>
+        </p:sp>
+        <p:sp>
+          <p:nvSpPr>
+            <p:cNvPr id="57" name="Text 20">
+              <a:extLst>
+                <a:ext uri="{FF2B5EF4-FFF2-40B4-BE49-F238E27FC236}">
+                  <a16:creationId xmlns:a16="http://schemas.microsoft.com/office/drawing/2014/main" id="{547CD1AB-C3F3-2C5B-5B27-268CF7F51C37}"/>
+                </a:ext>
+              </a:extLst>
+            </p:cNvPr>
+            <p:cNvSpPr/>
+            <p:nvPr/>
+          </p:nvSpPr>
+          <p:spPr>
+            <a:xfrm>
+              <a:off x="411480" y="4645152"/>
+              <a:ext cx="8321040" cy="274320"/>
+            </a:xfrm>
+            <a:prstGeom prst="rect">
+              <a:avLst/>
+            </a:prstGeom>
+            <a:noFill/>
+            <a:ln/>
+          </p:spPr>
+          <p:txBody>
+            <a:bodyPr wrap="square" lIns="0" tIns="0" rIns="0" bIns="0" rtlCol="0" anchor="ctr"/>
+            <a:lstStyle/>
+            <a:p>
+              <a:pPr marL="0" indent="0" algn="ctr">
+                <a:buNone/>
+              </a:pPr>
+              <a:r>
+                <a:rPr lang="en-US" sz="1600" dirty="0">
+                  <a:solidFill>
+                    <a:srgbClr val="FFFFFF"/>
+                  </a:solidFill>
+                </a:rPr>
+                <a:t>목표: 제조 라인의 건반 외관 결함을 실시간으로 자동 감지하여 품질 불량률 제로화</a:t>
+              </a:r>
+              <a:endParaRPr lang="en-US" sz="1600" dirty="0"/>
+            </a:p>
+          </p:txBody>
+        </p:sp>
+      </p:grpSp>
+    </p:spTree>
+    <p:extLst>
+      <p:ext uri="{BB962C8B-B14F-4D97-AF65-F5344CB8AC3E}">
+        <p14:creationId xmlns:p14="http://schemas.microsoft.com/office/powerpoint/2010/main" val="3695342319"/>
+      </p:ext>
+    </p:extLst>
+  </p:cSld>
+  <p:clrMapOvr>
+    <a:masterClrMapping/>
+  </p:clrMapOvr>
+</p:sld>
+</file>
+
+<file path=ppt/slides/slide20.xml><?xml version="1.0" encoding="utf-8"?>
 <p:sld xmlns:a="http://schemas.openxmlformats.org/drawingml/2006/main" xmlns:r="http://schemas.openxmlformats.org/officeDocument/2006/relationships" xmlns:p="http://schemas.openxmlformats.org/presentationml/2006/main">
   <p:cSld>
     <p:spTree>
@@ -10243,1199 +11810,7 @@
 </p:sld>
 </file>
 
-<file path=ppt/slides/slide2.xml><?xml version="1.0" encoding="utf-8"?>
-<p:sld xmlns:a="http://schemas.openxmlformats.org/drawingml/2006/main" xmlns:r="http://schemas.openxmlformats.org/officeDocument/2006/relationships" xmlns:p="http://schemas.openxmlformats.org/presentationml/2006/main">
-  <p:cSld>
-    <p:spTree>
-      <p:nvGrpSpPr>
-        <p:cNvPr id="1" name="">
-          <a:extLst>
-            <a:ext uri="{FF2B5EF4-FFF2-40B4-BE49-F238E27FC236}">
-              <a16:creationId xmlns:a16="http://schemas.microsoft.com/office/drawing/2014/main" id="{748D4D7B-CCFC-8D12-7A79-5352B38A3DBD}"/>
-            </a:ext>
-          </a:extLst>
-        </p:cNvPr>
-        <p:cNvGrpSpPr/>
-        <p:nvPr/>
-      </p:nvGrpSpPr>
-      <p:grpSpPr>
-        <a:xfrm>
-          <a:off x="0" y="0"/>
-          <a:ext cx="0" cy="0"/>
-          <a:chOff x="0" y="0"/>
-          <a:chExt cx="0" cy="0"/>
-        </a:xfrm>
-      </p:grpSpPr>
-      <p:sp>
-        <p:nvSpPr>
-          <p:cNvPr id="905" name="content_bg">
-            <a:extLst>
-              <a:ext uri="{FF2B5EF4-FFF2-40B4-BE49-F238E27FC236}">
-                <a16:creationId xmlns:a16="http://schemas.microsoft.com/office/drawing/2014/main" id="{1A7DF3F7-FD19-7171-88C5-1FBD20C2A7CA}"/>
-              </a:ext>
-            </a:extLst>
-          </p:cNvPr>
-          <p:cNvSpPr>
-            <a:spLocks noGrp="1"/>
-          </p:cNvSpPr>
-          <p:nvPr/>
-        </p:nvSpPr>
-        <p:spPr>
-          <a:xfrm>
-            <a:off x="0" y="820000"/>
-            <a:ext cx="12192000" cy="6038000"/>
-          </a:xfrm>
-          <a:prstGeom prst="rect">
-            <a:avLst/>
-          </a:prstGeom>
-          <a:solidFill>
-            <a:srgbClr val="EEF1F5"/>
-          </a:solidFill>
-        </p:spPr>
-        <p:txBody>
-          <a:bodyPr/>
-          <a:lstStyle/>
-          <a:p>
-            <a:endParaRPr lang="ko-KR"/>
-          </a:p>
-        </p:txBody>
-      </p:sp>
-      <p:sp>
-        <p:nvSpPr>
-          <p:cNvPr id="901" name="header_bar">
-            <a:extLst>
-              <a:ext uri="{FF2B5EF4-FFF2-40B4-BE49-F238E27FC236}">
-                <a16:creationId xmlns:a16="http://schemas.microsoft.com/office/drawing/2014/main" id="{ACE7E5DD-B69E-3D87-E561-8F45BD5FAAEE}"/>
-              </a:ext>
-            </a:extLst>
-          </p:cNvPr>
-          <p:cNvSpPr>
-            <a:spLocks noGrp="1"/>
-          </p:cNvSpPr>
-          <p:nvPr/>
-        </p:nvSpPr>
-        <p:spPr>
-          <a:xfrm>
-            <a:off x="0" y="0"/>
-            <a:ext cx="12192000" cy="820000"/>
-          </a:xfrm>
-          <a:prstGeom prst="rect">
-            <a:avLst/>
-          </a:prstGeom>
-          <a:solidFill>
-            <a:srgbClr val="1B2A4A"/>
-          </a:solidFill>
-        </p:spPr>
-        <p:txBody>
-          <a:bodyPr/>
-          <a:lstStyle/>
-          <a:p>
-            <a:endParaRPr lang="ko-KR"/>
-          </a:p>
-        </p:txBody>
-      </p:sp>
-      <p:sp>
-        <p:nvSpPr>
-          <p:cNvPr id="902" name="accent_stripe">
-            <a:extLst>
-              <a:ext uri="{FF2B5EF4-FFF2-40B4-BE49-F238E27FC236}">
-                <a16:creationId xmlns:a16="http://schemas.microsoft.com/office/drawing/2014/main" id="{33D156C9-3AA4-68AE-BFDD-77F69B5AA389}"/>
-              </a:ext>
-            </a:extLst>
-          </p:cNvPr>
-          <p:cNvSpPr>
-            <a:spLocks noGrp="1"/>
-          </p:cNvSpPr>
-          <p:nvPr/>
-        </p:nvSpPr>
-        <p:spPr>
-          <a:xfrm>
-            <a:off x="0" y="0"/>
-            <a:ext cx="120000" cy="820000"/>
-          </a:xfrm>
-          <a:prstGeom prst="rect">
-            <a:avLst/>
-          </a:prstGeom>
-          <a:solidFill>
-            <a:srgbClr val="E05A1A"/>
-          </a:solidFill>
-        </p:spPr>
-        <p:txBody>
-          <a:bodyPr/>
-          <a:lstStyle/>
-          <a:p>
-            <a:endParaRPr lang="ko-KR"/>
-          </a:p>
-        </p:txBody>
-      </p:sp>
-      <p:sp>
-        <p:nvSpPr>
-          <p:cNvPr id="904" name="step_badge">
-            <a:extLst>
-              <a:ext uri="{FF2B5EF4-FFF2-40B4-BE49-F238E27FC236}">
-                <a16:creationId xmlns:a16="http://schemas.microsoft.com/office/drawing/2014/main" id="{FB7BAA9C-F7D1-B55B-17BE-EBAA8411DC5E}"/>
-              </a:ext>
-            </a:extLst>
-          </p:cNvPr>
-          <p:cNvSpPr>
-            <a:spLocks noGrp="1"/>
-          </p:cNvSpPr>
-          <p:nvPr/>
-        </p:nvSpPr>
-        <p:spPr>
-          <a:xfrm>
-            <a:off x="11492000" y="0"/>
-            <a:ext cx="700000" cy="820000"/>
-          </a:xfrm>
-          <a:prstGeom prst="rect">
-            <a:avLst/>
-          </a:prstGeom>
-          <a:solidFill>
-            <a:srgbClr val="E05A1A"/>
-          </a:solidFill>
-        </p:spPr>
-        <p:txBody>
-          <a:bodyPr wrap="square" rtlCol="0" anchor="ctr">
-            <a:noAutofit/>
-          </a:bodyPr>
-          <a:lstStyle/>
-          <a:p>
-            <a:pPr algn="ctr"/>
-            <a:r>
-              <a:rPr lang="en-US" sz="2400" b="1" dirty="0">
-                <a:solidFill>
-                  <a:srgbClr val="FFFFFF"/>
-                </a:solidFill>
-              </a:rPr>
-              <a:t>01</a:t>
-            </a:r>
-          </a:p>
-        </p:txBody>
-      </p:sp>
-      <p:sp>
-        <p:nvSpPr>
-          <p:cNvPr id="910" name="cat_badge">
-            <a:extLst>
-              <a:ext uri="{FF2B5EF4-FFF2-40B4-BE49-F238E27FC236}">
-                <a16:creationId xmlns:a16="http://schemas.microsoft.com/office/drawing/2014/main" id="{EFCC09E3-BCF8-0291-8A5D-7273F080770A}"/>
-              </a:ext>
-            </a:extLst>
-          </p:cNvPr>
-          <p:cNvSpPr>
-            <a:spLocks noGrp="1"/>
-          </p:cNvSpPr>
-          <p:nvPr/>
-        </p:nvSpPr>
-        <p:spPr>
-          <a:xfrm>
-            <a:off x="320000" y="110000"/>
-            <a:ext cx="1350000" cy="600000"/>
-          </a:xfrm>
-          <a:prstGeom prst="roundRect">
-            <a:avLst>
-              <a:gd name="adj" fmla="val 20000"/>
-            </a:avLst>
-          </a:prstGeom>
-          <a:solidFill>
-            <a:srgbClr val="E05A1A">
-              <a:alpha val="28000"/>
-            </a:srgbClr>
-          </a:solidFill>
-          <a:ln>
-            <a:noFill/>
-          </a:ln>
-        </p:spPr>
-        <p:txBody>
-          <a:bodyPr wrap="square" rtlCol="0" anchor="ctr">
-            <a:noAutofit/>
-          </a:bodyPr>
-          <a:lstStyle/>
-          <a:p>
-            <a:pPr algn="ctr"/>
-            <a:r>
-              <a:rPr lang="ko-KR" altLang="en-US" sz="1400" b="1" dirty="0">
-                <a:solidFill>
-                  <a:srgbClr val="FFBB88"/>
-                </a:solidFill>
-              </a:rPr>
-              <a:t>개요</a:t>
-            </a:r>
-          </a:p>
-        </p:txBody>
-      </p:sp>
-      <p:sp>
-        <p:nvSpPr>
-          <p:cNvPr id="903" name="header_title">
-            <a:extLst>
-              <a:ext uri="{FF2B5EF4-FFF2-40B4-BE49-F238E27FC236}">
-                <a16:creationId xmlns:a16="http://schemas.microsoft.com/office/drawing/2014/main" id="{316431B5-7AC5-7FFB-E296-984F94A61EE9}"/>
-              </a:ext>
-            </a:extLst>
-          </p:cNvPr>
-          <p:cNvSpPr txBox="1"/>
-          <p:nvPr/>
-        </p:nvSpPr>
-        <p:spPr>
-          <a:xfrm>
-            <a:off x="1830000" y="0"/>
-            <a:ext cx="9562000" cy="820000"/>
-          </a:xfrm>
-          <a:prstGeom prst="rect">
-            <a:avLst/>
-          </a:prstGeom>
-          <a:noFill/>
-        </p:spPr>
-        <p:txBody>
-          <a:bodyPr wrap="square" rtlCol="0" anchor="ctr">
-            <a:noAutofit/>
-          </a:bodyPr>
-          <a:lstStyle/>
-          <a:p>
-            <a:r>
-              <a:rPr lang="ko-KR" altLang="en-US" sz="2000" b="1" dirty="0">
-                <a:solidFill>
-                  <a:srgbClr val="FFFFFF"/>
-                </a:solidFill>
-              </a:rPr>
-              <a:t>프로젝트 개요</a:t>
-            </a:r>
-          </a:p>
-        </p:txBody>
-      </p:sp>
-      <p:grpSp>
-        <p:nvGrpSpPr>
-          <p:cNvPr id="58" name="그룹 57">
-            <a:extLst>
-              <a:ext uri="{FF2B5EF4-FFF2-40B4-BE49-F238E27FC236}">
-                <a16:creationId xmlns:a16="http://schemas.microsoft.com/office/drawing/2014/main" id="{0FA0B009-9651-5428-AD15-FF6A73F6CE03}"/>
-              </a:ext>
-            </a:extLst>
-          </p:cNvPr>
-          <p:cNvGrpSpPr/>
-          <p:nvPr/>
-        </p:nvGrpSpPr>
-        <p:grpSpPr>
-          <a:xfrm>
-            <a:off x="433190" y="1218050"/>
-            <a:ext cx="11325620" cy="5389784"/>
-            <a:chOff x="320040" y="1097280"/>
-            <a:chExt cx="8549640" cy="3867912"/>
-          </a:xfrm>
-        </p:grpSpPr>
-        <p:sp>
-          <p:nvSpPr>
-            <p:cNvPr id="40" name="Shape 3">
-              <a:extLst>
-                <a:ext uri="{FF2B5EF4-FFF2-40B4-BE49-F238E27FC236}">
-                  <a16:creationId xmlns:a16="http://schemas.microsoft.com/office/drawing/2014/main" id="{09C1A38E-04CD-B530-6107-A13FF60823FE}"/>
-                </a:ext>
-              </a:extLst>
-            </p:cNvPr>
-            <p:cNvSpPr/>
-            <p:nvPr/>
-          </p:nvSpPr>
-          <p:spPr>
-            <a:xfrm>
-              <a:off x="320040" y="1097280"/>
-              <a:ext cx="4114800" cy="1554480"/>
-            </a:xfrm>
-            <a:prstGeom prst="rect">
-              <a:avLst/>
-            </a:prstGeom>
-            <a:solidFill>
-              <a:srgbClr val="FFFFFF"/>
-            </a:solidFill>
-            <a:ln w="12700">
-              <a:solidFill>
-                <a:srgbClr val="D0D8EC"/>
-              </a:solidFill>
-              <a:prstDash val="solid"/>
-            </a:ln>
-            <a:effectLst>
-              <a:outerShdw blurRad="101600" dist="38100" dir="8100000" algn="bl" rotWithShape="0">
-                <a:srgbClr val="000000">
-                  <a:alpha val="18000"/>
-                </a:srgbClr>
-              </a:outerShdw>
-            </a:effectLst>
-          </p:spPr>
-          <p:txBody>
-            <a:bodyPr/>
-            <a:lstStyle/>
-            <a:p>
-              <a:endParaRPr lang="ko-KR" altLang="en-US"/>
-            </a:p>
-          </p:txBody>
-        </p:sp>
-        <p:sp>
-          <p:nvSpPr>
-            <p:cNvPr id="41" name="Shape 4">
-              <a:extLst>
-                <a:ext uri="{FF2B5EF4-FFF2-40B4-BE49-F238E27FC236}">
-                  <a16:creationId xmlns:a16="http://schemas.microsoft.com/office/drawing/2014/main" id="{8AA5E232-DA9B-7428-06FF-EE5E1390CF4B}"/>
-                </a:ext>
-              </a:extLst>
-            </p:cNvPr>
-            <p:cNvSpPr/>
-            <p:nvPr/>
-          </p:nvSpPr>
-          <p:spPr>
-            <a:xfrm>
-              <a:off x="320040" y="1097280"/>
-              <a:ext cx="54864" cy="1554480"/>
-            </a:xfrm>
-            <a:prstGeom prst="rect">
-              <a:avLst/>
-            </a:prstGeom>
-            <a:solidFill>
-              <a:srgbClr val="E05A1A"/>
-            </a:solidFill>
-            <a:ln w="12700">
-              <a:solidFill>
-                <a:srgbClr val="E05A1A"/>
-              </a:solidFill>
-              <a:prstDash val="solid"/>
-            </a:ln>
-          </p:spPr>
-          <p:txBody>
-            <a:bodyPr/>
-            <a:lstStyle/>
-            <a:p>
-              <a:endParaRPr lang="ko-KR" altLang="en-US"/>
-            </a:p>
-          </p:txBody>
-        </p:sp>
-        <p:sp>
-          <p:nvSpPr>
-            <p:cNvPr id="42" name="Text 5">
-              <a:extLst>
-                <a:ext uri="{FF2B5EF4-FFF2-40B4-BE49-F238E27FC236}">
-                  <a16:creationId xmlns:a16="http://schemas.microsoft.com/office/drawing/2014/main" id="{B5ACDA61-0ACF-DE7B-1481-747ACAA652EB}"/>
-                </a:ext>
-              </a:extLst>
-            </p:cNvPr>
-            <p:cNvSpPr/>
-            <p:nvPr/>
-          </p:nvSpPr>
-          <p:spPr>
-            <a:xfrm>
-              <a:off x="457200" y="1207008"/>
-              <a:ext cx="3840480" cy="347472"/>
-            </a:xfrm>
-            <a:prstGeom prst="rect">
-              <a:avLst/>
-            </a:prstGeom>
-            <a:noFill/>
-            <a:ln/>
-          </p:spPr>
-          <p:txBody>
-            <a:bodyPr wrap="square" lIns="0" tIns="0" rIns="0" bIns="0" rtlCol="0" anchor="ctr"/>
-            <a:lstStyle/>
-            <a:p>
-              <a:pPr marL="0" indent="0">
-                <a:buNone/>
-              </a:pPr>
-              <a:r>
-                <a:rPr lang="en-US" sz="1600" b="1" dirty="0">
-                  <a:solidFill>
-                    <a:srgbClr val="1B2A4A"/>
-                  </a:solidFill>
-                </a:rPr>
-                <a:t>🎹  검사 대상</a:t>
-              </a:r>
-              <a:endParaRPr lang="en-US" dirty="0"/>
-            </a:p>
-          </p:txBody>
-        </p:sp>
-        <p:sp>
-          <p:nvSpPr>
-            <p:cNvPr id="43" name="Text 6">
-              <a:extLst>
-                <a:ext uri="{FF2B5EF4-FFF2-40B4-BE49-F238E27FC236}">
-                  <a16:creationId xmlns:a16="http://schemas.microsoft.com/office/drawing/2014/main" id="{784D9AFA-CBC0-129F-F0CE-15941D785DB6}"/>
-                </a:ext>
-              </a:extLst>
-            </p:cNvPr>
-            <p:cNvSpPr/>
-            <p:nvPr/>
-          </p:nvSpPr>
-          <p:spPr>
-            <a:xfrm>
-              <a:off x="457200" y="1609344"/>
-              <a:ext cx="3840480" cy="914400"/>
-            </a:xfrm>
-            <a:prstGeom prst="rect">
-              <a:avLst/>
-            </a:prstGeom>
-            <a:noFill/>
-            <a:ln/>
-          </p:spPr>
-          <p:txBody>
-            <a:bodyPr wrap="square" lIns="0" tIns="0" rIns="0" bIns="0" rtlCol="0" anchor="ctr"/>
-            <a:lstStyle/>
-            <a:p>
-              <a:pPr marL="0" indent="0">
-                <a:lnSpc>
-                  <a:spcPct val="130000"/>
-                </a:lnSpc>
-                <a:buNone/>
-              </a:pPr>
-              <a:r>
-                <a:rPr lang="en-US" sz="1400" dirty="0" err="1">
-                  <a:solidFill>
-                    <a:srgbClr val="3A4A6B"/>
-                  </a:solidFill>
-                </a:rPr>
-                <a:t>실로폰</a:t>
-              </a:r>
-              <a:r>
-                <a:rPr lang="en-US" sz="1400" dirty="0">
-                  <a:solidFill>
-                    <a:srgbClr val="3A4A6B"/>
-                  </a:solidFill>
-                </a:rPr>
-                <a:t> 건반 부품</a:t>
-              </a:r>
-              <a:endParaRPr lang="en-US" dirty="0"/>
-            </a:p>
-            <a:p>
-              <a:pPr marL="0" indent="0">
-                <a:lnSpc>
-                  <a:spcPct val="130000"/>
-                </a:lnSpc>
-                <a:buNone/>
-              </a:pPr>
-              <a:r>
-                <a:rPr lang="en-US" sz="1400" dirty="0">
-                  <a:solidFill>
-                    <a:srgbClr val="3A4A6B"/>
-                  </a:solidFill>
-                </a:rPr>
-                <a:t>볼트 체결 상태 + 각인(Mark) </a:t>
-              </a:r>
-              <a:r>
-                <a:rPr lang="ko-KR" altLang="en-US" sz="1400" dirty="0">
-                  <a:solidFill>
-                    <a:srgbClr val="3A4A6B"/>
-                  </a:solidFill>
-                </a:rPr>
-                <a:t>유무</a:t>
-              </a:r>
-              <a:r>
-                <a:rPr lang="en-US" sz="1400" dirty="0">
-                  <a:solidFill>
-                    <a:srgbClr val="3A4A6B"/>
-                  </a:solidFill>
-                </a:rPr>
-                <a:t> 자동 판정</a:t>
-              </a:r>
-              <a:endParaRPr lang="en-US" dirty="0"/>
-            </a:p>
-          </p:txBody>
-        </p:sp>
-        <p:sp>
-          <p:nvSpPr>
-            <p:cNvPr id="44" name="Shape 7">
-              <a:extLst>
-                <a:ext uri="{FF2B5EF4-FFF2-40B4-BE49-F238E27FC236}">
-                  <a16:creationId xmlns:a16="http://schemas.microsoft.com/office/drawing/2014/main" id="{D00EA473-3C01-16B6-BC8C-9598C77E91AB}"/>
-                </a:ext>
-              </a:extLst>
-            </p:cNvPr>
-            <p:cNvSpPr/>
-            <p:nvPr/>
-          </p:nvSpPr>
-          <p:spPr>
-            <a:xfrm>
-              <a:off x="4754880" y="1097280"/>
-              <a:ext cx="4114800" cy="1554480"/>
-            </a:xfrm>
-            <a:prstGeom prst="rect">
-              <a:avLst/>
-            </a:prstGeom>
-            <a:solidFill>
-              <a:srgbClr val="FFFFFF"/>
-            </a:solidFill>
-            <a:ln w="12700">
-              <a:solidFill>
-                <a:srgbClr val="D0D8EC"/>
-              </a:solidFill>
-              <a:prstDash val="solid"/>
-            </a:ln>
-            <a:effectLst>
-              <a:outerShdw blurRad="101600" dist="38100" dir="8100000" algn="bl" rotWithShape="0">
-                <a:srgbClr val="000000">
-                  <a:alpha val="18000"/>
-                </a:srgbClr>
-              </a:outerShdw>
-            </a:effectLst>
-          </p:spPr>
-          <p:txBody>
-            <a:bodyPr/>
-            <a:lstStyle/>
-            <a:p>
-              <a:endParaRPr lang="ko-KR" altLang="en-US"/>
-            </a:p>
-          </p:txBody>
-        </p:sp>
-        <p:sp>
-          <p:nvSpPr>
-            <p:cNvPr id="45" name="Shape 8">
-              <a:extLst>
-                <a:ext uri="{FF2B5EF4-FFF2-40B4-BE49-F238E27FC236}">
-                  <a16:creationId xmlns:a16="http://schemas.microsoft.com/office/drawing/2014/main" id="{5D837131-F3EB-CEC9-E953-596D533150C2}"/>
-                </a:ext>
-              </a:extLst>
-            </p:cNvPr>
-            <p:cNvSpPr/>
-            <p:nvPr/>
-          </p:nvSpPr>
-          <p:spPr>
-            <a:xfrm>
-              <a:off x="4754880" y="1097280"/>
-              <a:ext cx="54864" cy="1554480"/>
-            </a:xfrm>
-            <a:prstGeom prst="rect">
-              <a:avLst/>
-            </a:prstGeom>
-            <a:solidFill>
-              <a:srgbClr val="E05A1A"/>
-            </a:solidFill>
-            <a:ln w="12700">
-              <a:solidFill>
-                <a:srgbClr val="E05A1A"/>
-              </a:solidFill>
-              <a:prstDash val="solid"/>
-            </a:ln>
-          </p:spPr>
-          <p:txBody>
-            <a:bodyPr/>
-            <a:lstStyle/>
-            <a:p>
-              <a:endParaRPr lang="ko-KR" altLang="en-US"/>
-            </a:p>
-          </p:txBody>
-        </p:sp>
-        <p:sp>
-          <p:nvSpPr>
-            <p:cNvPr id="46" name="Text 9">
-              <a:extLst>
-                <a:ext uri="{FF2B5EF4-FFF2-40B4-BE49-F238E27FC236}">
-                  <a16:creationId xmlns:a16="http://schemas.microsoft.com/office/drawing/2014/main" id="{BE23CE6E-1E98-5FF0-FDC8-1C35AA4E98B5}"/>
-                </a:ext>
-              </a:extLst>
-            </p:cNvPr>
-            <p:cNvSpPr/>
-            <p:nvPr/>
-          </p:nvSpPr>
-          <p:spPr>
-            <a:xfrm>
-              <a:off x="4892040" y="1207008"/>
-              <a:ext cx="3840480" cy="347472"/>
-            </a:xfrm>
-            <a:prstGeom prst="rect">
-              <a:avLst/>
-            </a:prstGeom>
-            <a:noFill/>
-            <a:ln/>
-          </p:spPr>
-          <p:txBody>
-            <a:bodyPr wrap="square" lIns="0" tIns="0" rIns="0" bIns="0" rtlCol="0" anchor="ctr"/>
-            <a:lstStyle/>
-            <a:p>
-              <a:pPr marL="0" indent="0">
-                <a:buNone/>
-              </a:pPr>
-              <a:r>
-                <a:rPr lang="en-US" sz="1600" b="1" dirty="0">
-                  <a:solidFill>
-                    <a:srgbClr val="1B2A4A"/>
-                  </a:solidFill>
-                </a:rPr>
-                <a:t>📷  영상 취득</a:t>
-              </a:r>
-              <a:endParaRPr lang="en-US" dirty="0"/>
-            </a:p>
-          </p:txBody>
-        </p:sp>
-        <p:sp>
-          <p:nvSpPr>
-            <p:cNvPr id="47" name="Text 10">
-              <a:extLst>
-                <a:ext uri="{FF2B5EF4-FFF2-40B4-BE49-F238E27FC236}">
-                  <a16:creationId xmlns:a16="http://schemas.microsoft.com/office/drawing/2014/main" id="{5F76ECB1-99DF-B884-5755-87C6D1C8508B}"/>
-                </a:ext>
-              </a:extLst>
-            </p:cNvPr>
-            <p:cNvSpPr/>
-            <p:nvPr/>
-          </p:nvSpPr>
-          <p:spPr>
-            <a:xfrm>
-              <a:off x="4892040" y="1609344"/>
-              <a:ext cx="3840480" cy="914400"/>
-            </a:xfrm>
-            <a:prstGeom prst="rect">
-              <a:avLst/>
-            </a:prstGeom>
-            <a:noFill/>
-            <a:ln/>
-          </p:spPr>
-          <p:txBody>
-            <a:bodyPr wrap="square" lIns="0" tIns="0" rIns="0" bIns="0" rtlCol="0" anchor="ctr"/>
-            <a:lstStyle/>
-            <a:p>
-              <a:pPr marL="0" indent="0">
-                <a:lnSpc>
-                  <a:spcPct val="130000"/>
-                </a:lnSpc>
-                <a:buNone/>
-              </a:pPr>
-              <a:r>
-                <a:rPr lang="en-US" sz="1400" dirty="0">
-                  <a:solidFill>
-                    <a:srgbClr val="3A4A6B"/>
-                  </a:solidFill>
-                </a:rPr>
-                <a:t>실시간 카메라 (WebCam / HikRobot)</a:t>
-              </a:r>
-              <a:endParaRPr lang="en-US" dirty="0"/>
-            </a:p>
-            <a:p>
-              <a:pPr marL="0" indent="0">
-                <a:lnSpc>
-                  <a:spcPct val="130000"/>
-                </a:lnSpc>
-                <a:buNone/>
-              </a:pPr>
-              <a:r>
-                <a:rPr lang="en-US" sz="1400" dirty="0">
-                  <a:solidFill>
-                    <a:srgbClr val="3A4A6B"/>
-                  </a:solidFill>
-                </a:rPr>
-                <a:t>가상 그랩 (폴더 이미지 시뮬레이션)</a:t>
-              </a:r>
-              <a:endParaRPr lang="en-US" dirty="0"/>
-            </a:p>
-          </p:txBody>
-        </p:sp>
-        <p:sp>
-          <p:nvSpPr>
-            <p:cNvPr id="48" name="Shape 11">
-              <a:extLst>
-                <a:ext uri="{FF2B5EF4-FFF2-40B4-BE49-F238E27FC236}">
-                  <a16:creationId xmlns:a16="http://schemas.microsoft.com/office/drawing/2014/main" id="{095EBC33-94DF-3ED7-722D-E0EE9401C634}"/>
-                </a:ext>
-              </a:extLst>
-            </p:cNvPr>
-            <p:cNvSpPr/>
-            <p:nvPr/>
-          </p:nvSpPr>
-          <p:spPr>
-            <a:xfrm>
-              <a:off x="320040" y="2880360"/>
-              <a:ext cx="4114800" cy="1554480"/>
-            </a:xfrm>
-            <a:prstGeom prst="rect">
-              <a:avLst/>
-            </a:prstGeom>
-            <a:solidFill>
-              <a:srgbClr val="FFFFFF"/>
-            </a:solidFill>
-            <a:ln w="12700">
-              <a:solidFill>
-                <a:srgbClr val="D0D8EC"/>
-              </a:solidFill>
-              <a:prstDash val="solid"/>
-            </a:ln>
-            <a:effectLst>
-              <a:outerShdw blurRad="101600" dist="38100" dir="8100000" algn="bl" rotWithShape="0">
-                <a:srgbClr val="000000">
-                  <a:alpha val="18000"/>
-                </a:srgbClr>
-              </a:outerShdw>
-            </a:effectLst>
-          </p:spPr>
-          <p:txBody>
-            <a:bodyPr/>
-            <a:lstStyle/>
-            <a:p>
-              <a:endParaRPr lang="ko-KR" altLang="en-US"/>
-            </a:p>
-          </p:txBody>
-        </p:sp>
-        <p:sp>
-          <p:nvSpPr>
-            <p:cNvPr id="49" name="Shape 12">
-              <a:extLst>
-                <a:ext uri="{FF2B5EF4-FFF2-40B4-BE49-F238E27FC236}">
-                  <a16:creationId xmlns:a16="http://schemas.microsoft.com/office/drawing/2014/main" id="{CB7CB110-7F1A-386D-F8F8-DE0E22F67979}"/>
-                </a:ext>
-              </a:extLst>
-            </p:cNvPr>
-            <p:cNvSpPr/>
-            <p:nvPr/>
-          </p:nvSpPr>
-          <p:spPr>
-            <a:xfrm>
-              <a:off x="320040" y="2880360"/>
-              <a:ext cx="54864" cy="1554480"/>
-            </a:xfrm>
-            <a:prstGeom prst="rect">
-              <a:avLst/>
-            </a:prstGeom>
-            <a:solidFill>
-              <a:srgbClr val="E05A1A"/>
-            </a:solidFill>
-            <a:ln w="12700">
-              <a:solidFill>
-                <a:srgbClr val="E05A1A"/>
-              </a:solidFill>
-              <a:prstDash val="solid"/>
-            </a:ln>
-          </p:spPr>
-          <p:txBody>
-            <a:bodyPr/>
-            <a:lstStyle/>
-            <a:p>
-              <a:endParaRPr lang="ko-KR" altLang="en-US"/>
-            </a:p>
-          </p:txBody>
-        </p:sp>
-        <p:sp>
-          <p:nvSpPr>
-            <p:cNvPr id="50" name="Text 13">
-              <a:extLst>
-                <a:ext uri="{FF2B5EF4-FFF2-40B4-BE49-F238E27FC236}">
-                  <a16:creationId xmlns:a16="http://schemas.microsoft.com/office/drawing/2014/main" id="{C0F33324-CC22-0C1D-ADAB-475DDCF416D7}"/>
-                </a:ext>
-              </a:extLst>
-            </p:cNvPr>
-            <p:cNvSpPr/>
-            <p:nvPr/>
-          </p:nvSpPr>
-          <p:spPr>
-            <a:xfrm>
-              <a:off x="457200" y="2990088"/>
-              <a:ext cx="3840480" cy="347472"/>
-            </a:xfrm>
-            <a:prstGeom prst="rect">
-              <a:avLst/>
-            </a:prstGeom>
-            <a:noFill/>
-            <a:ln/>
-          </p:spPr>
-          <p:txBody>
-            <a:bodyPr wrap="square" lIns="0" tIns="0" rIns="0" bIns="0" rtlCol="0" anchor="ctr"/>
-            <a:lstStyle/>
-            <a:p>
-              <a:pPr marL="0" indent="0">
-                <a:buNone/>
-              </a:pPr>
-              <a:r>
-                <a:rPr lang="en-US" sz="1600" b="1" dirty="0">
-                  <a:solidFill>
-                    <a:srgbClr val="1B2A4A"/>
-                  </a:solidFill>
-                </a:rPr>
-                <a:t>⚙️  핵심 기술</a:t>
-              </a:r>
-              <a:endParaRPr lang="en-US" dirty="0"/>
-            </a:p>
-          </p:txBody>
-        </p:sp>
-        <p:sp>
-          <p:nvSpPr>
-            <p:cNvPr id="51" name="Text 14">
-              <a:extLst>
-                <a:ext uri="{FF2B5EF4-FFF2-40B4-BE49-F238E27FC236}">
-                  <a16:creationId xmlns:a16="http://schemas.microsoft.com/office/drawing/2014/main" id="{BE656C4A-6801-CB26-84E3-BAE77F4480FB}"/>
-                </a:ext>
-              </a:extLst>
-            </p:cNvPr>
-            <p:cNvSpPr/>
-            <p:nvPr/>
-          </p:nvSpPr>
-          <p:spPr>
-            <a:xfrm>
-              <a:off x="457200" y="3392424"/>
-              <a:ext cx="3840480" cy="914400"/>
-            </a:xfrm>
-            <a:prstGeom prst="rect">
-              <a:avLst/>
-            </a:prstGeom>
-            <a:noFill/>
-            <a:ln/>
-          </p:spPr>
-          <p:txBody>
-            <a:bodyPr wrap="square" lIns="0" tIns="0" rIns="0" bIns="0" rtlCol="0" anchor="ctr"/>
-            <a:lstStyle/>
-            <a:p>
-              <a:pPr marL="0" indent="0">
-                <a:lnSpc>
-                  <a:spcPct val="130000"/>
-                </a:lnSpc>
-                <a:buNone/>
-              </a:pPr>
-              <a:r>
-                <a:rPr lang="en-US" sz="1400" dirty="0">
-                  <a:solidFill>
-                    <a:srgbClr val="3A4A6B"/>
-                  </a:solidFill>
-                </a:rPr>
-                <a:t>OpenCvSharp 기반 Computer Vision</a:t>
-              </a:r>
-              <a:endParaRPr lang="en-US" dirty="0"/>
-            </a:p>
-            <a:p>
-              <a:pPr marL="0" indent="0">
-                <a:lnSpc>
-                  <a:spcPct val="130000"/>
-                </a:lnSpc>
-                <a:buNone/>
-              </a:pPr>
-              <a:r>
-                <a:rPr lang="en-US" sz="1400" dirty="0">
-                  <a:solidFill>
-                    <a:srgbClr val="3A4A6B"/>
-                  </a:solidFill>
-                </a:rPr>
-                <a:t>C# 멀티스레딩 / BlockingCollection 큐</a:t>
-              </a:r>
-              <a:endParaRPr lang="en-US" dirty="0"/>
-            </a:p>
-          </p:txBody>
-        </p:sp>
-        <p:sp>
-          <p:nvSpPr>
-            <p:cNvPr id="52" name="Shape 15">
-              <a:extLst>
-                <a:ext uri="{FF2B5EF4-FFF2-40B4-BE49-F238E27FC236}">
-                  <a16:creationId xmlns:a16="http://schemas.microsoft.com/office/drawing/2014/main" id="{9EFC4709-BFB2-83E8-0FF8-81B2B762BCA4}"/>
-                </a:ext>
-              </a:extLst>
-            </p:cNvPr>
-            <p:cNvSpPr/>
-            <p:nvPr/>
-          </p:nvSpPr>
-          <p:spPr>
-            <a:xfrm>
-              <a:off x="4754880" y="2880360"/>
-              <a:ext cx="4114800" cy="1554480"/>
-            </a:xfrm>
-            <a:prstGeom prst="rect">
-              <a:avLst/>
-            </a:prstGeom>
-            <a:solidFill>
-              <a:srgbClr val="FFFFFF"/>
-            </a:solidFill>
-            <a:ln w="12700">
-              <a:solidFill>
-                <a:srgbClr val="D0D8EC"/>
-              </a:solidFill>
-              <a:prstDash val="solid"/>
-            </a:ln>
-            <a:effectLst>
-              <a:outerShdw blurRad="101600" dist="38100" dir="8100000" algn="bl" rotWithShape="0">
-                <a:srgbClr val="000000">
-                  <a:alpha val="18000"/>
-                </a:srgbClr>
-              </a:outerShdw>
-            </a:effectLst>
-          </p:spPr>
-          <p:txBody>
-            <a:bodyPr/>
-            <a:lstStyle/>
-            <a:p>
-              <a:endParaRPr lang="ko-KR" altLang="en-US"/>
-            </a:p>
-          </p:txBody>
-        </p:sp>
-        <p:sp>
-          <p:nvSpPr>
-            <p:cNvPr id="53" name="Shape 16">
-              <a:extLst>
-                <a:ext uri="{FF2B5EF4-FFF2-40B4-BE49-F238E27FC236}">
-                  <a16:creationId xmlns:a16="http://schemas.microsoft.com/office/drawing/2014/main" id="{1330D2DE-A835-BE3E-FCE4-58725E252641}"/>
-                </a:ext>
-              </a:extLst>
-            </p:cNvPr>
-            <p:cNvSpPr/>
-            <p:nvPr/>
-          </p:nvSpPr>
-          <p:spPr>
-            <a:xfrm>
-              <a:off x="4754880" y="2880360"/>
-              <a:ext cx="54864" cy="1554480"/>
-            </a:xfrm>
-            <a:prstGeom prst="rect">
-              <a:avLst/>
-            </a:prstGeom>
-            <a:solidFill>
-              <a:srgbClr val="E05A1A"/>
-            </a:solidFill>
-            <a:ln w="12700">
-              <a:solidFill>
-                <a:srgbClr val="E05A1A"/>
-              </a:solidFill>
-              <a:prstDash val="solid"/>
-            </a:ln>
-          </p:spPr>
-          <p:txBody>
-            <a:bodyPr/>
-            <a:lstStyle/>
-            <a:p>
-              <a:endParaRPr lang="ko-KR" altLang="en-US"/>
-            </a:p>
-          </p:txBody>
-        </p:sp>
-        <p:sp>
-          <p:nvSpPr>
-            <p:cNvPr id="54" name="Text 17">
-              <a:extLst>
-                <a:ext uri="{FF2B5EF4-FFF2-40B4-BE49-F238E27FC236}">
-                  <a16:creationId xmlns:a16="http://schemas.microsoft.com/office/drawing/2014/main" id="{B8D550C7-B4B4-7E53-C940-4A59D4AA936A}"/>
-                </a:ext>
-              </a:extLst>
-            </p:cNvPr>
-            <p:cNvSpPr/>
-            <p:nvPr/>
-          </p:nvSpPr>
-          <p:spPr>
-            <a:xfrm>
-              <a:off x="4892040" y="2990088"/>
-              <a:ext cx="3840480" cy="347472"/>
-            </a:xfrm>
-            <a:prstGeom prst="rect">
-              <a:avLst/>
-            </a:prstGeom>
-            <a:noFill/>
-            <a:ln/>
-          </p:spPr>
-          <p:txBody>
-            <a:bodyPr wrap="square" lIns="0" tIns="0" rIns="0" bIns="0" rtlCol="0" anchor="ctr"/>
-            <a:lstStyle/>
-            <a:p>
-              <a:pPr marL="0" indent="0">
-                <a:buNone/>
-              </a:pPr>
-              <a:r>
-                <a:rPr lang="en-US" sz="1600" b="1" dirty="0">
-                  <a:solidFill>
-                    <a:srgbClr val="1B2A4A"/>
-                  </a:solidFill>
-                </a:rPr>
-                <a:t>💾  결과 처리</a:t>
-              </a:r>
-              <a:endParaRPr lang="en-US" dirty="0"/>
-            </a:p>
-          </p:txBody>
-        </p:sp>
-        <p:sp>
-          <p:nvSpPr>
-            <p:cNvPr id="55" name="Text 18">
-              <a:extLst>
-                <a:ext uri="{FF2B5EF4-FFF2-40B4-BE49-F238E27FC236}">
-                  <a16:creationId xmlns:a16="http://schemas.microsoft.com/office/drawing/2014/main" id="{895672BA-A5D5-80D0-5CD6-952B30CD7EDE}"/>
-                </a:ext>
-              </a:extLst>
-            </p:cNvPr>
-            <p:cNvSpPr/>
-            <p:nvPr/>
-          </p:nvSpPr>
-          <p:spPr>
-            <a:xfrm>
-              <a:off x="4892040" y="3392424"/>
-              <a:ext cx="3840480" cy="914400"/>
-            </a:xfrm>
-            <a:prstGeom prst="rect">
-              <a:avLst/>
-            </a:prstGeom>
-            <a:noFill/>
-            <a:ln/>
-          </p:spPr>
-          <p:txBody>
-            <a:bodyPr wrap="square" lIns="0" tIns="0" rIns="0" bIns="0" rtlCol="0" anchor="ctr"/>
-            <a:lstStyle/>
-            <a:p>
-              <a:pPr marL="0" indent="0">
-                <a:lnSpc>
-                  <a:spcPct val="130000"/>
-                </a:lnSpc>
-                <a:buNone/>
-              </a:pPr>
-              <a:r>
-                <a:rPr lang="en-US" sz="1400" dirty="0">
-                  <a:solidFill>
-                    <a:srgbClr val="3A4A6B"/>
-                  </a:solidFill>
-                </a:rPr>
-                <a:t>OK / NG-BOLT / NG-MARK 폴더 자동 분류</a:t>
-              </a:r>
-              <a:endParaRPr lang="en-US" dirty="0"/>
-            </a:p>
-            <a:p>
-              <a:pPr marL="0" indent="0">
-                <a:lnSpc>
-                  <a:spcPct val="130000"/>
-                </a:lnSpc>
-                <a:buNone/>
-              </a:pPr>
-              <a:r>
-                <a:rPr lang="en-US" sz="1400" dirty="0">
-                  <a:solidFill>
-                    <a:srgbClr val="3A4A6B"/>
-                  </a:solidFill>
-                </a:rPr>
-                <a:t>비동기 이미지 저장 (별도 전용 </a:t>
-              </a:r>
-              <a:r>
-                <a:rPr lang="en-US" sz="1400" dirty="0" err="1">
-                  <a:solidFill>
-                    <a:srgbClr val="3A4A6B"/>
-                  </a:solidFill>
-                </a:rPr>
-                <a:t>스레드</a:t>
-              </a:r>
-              <a:r>
-                <a:rPr lang="en-US" sz="1400" dirty="0">
-                  <a:solidFill>
-                    <a:srgbClr val="3A4A6B"/>
-                  </a:solidFill>
-                </a:rPr>
-                <a:t>)</a:t>
-              </a:r>
-            </a:p>
-            <a:p>
-              <a:pPr marL="0" indent="0">
-                <a:lnSpc>
-                  <a:spcPct val="130000"/>
-                </a:lnSpc>
-                <a:buNone/>
-              </a:pPr>
-              <a:r>
-                <a:rPr lang="en-US" sz="1400" dirty="0" err="1">
-                  <a:solidFill>
-                    <a:srgbClr val="3A4A6B"/>
-                  </a:solidFill>
-                </a:rPr>
-                <a:t>Log.cvs</a:t>
-              </a:r>
-              <a:r>
-                <a:rPr lang="ko-KR" altLang="en-US" sz="1400" dirty="0">
-                  <a:solidFill>
-                    <a:srgbClr val="3A4A6B"/>
-                  </a:solidFill>
-                </a:rPr>
-                <a:t> 파일 생성</a:t>
-              </a:r>
-              <a:endParaRPr lang="en-US" dirty="0"/>
-            </a:p>
-          </p:txBody>
-        </p:sp>
-        <p:sp>
-          <p:nvSpPr>
-            <p:cNvPr id="56" name="Shape 19">
-              <a:extLst>
-                <a:ext uri="{FF2B5EF4-FFF2-40B4-BE49-F238E27FC236}">
-                  <a16:creationId xmlns:a16="http://schemas.microsoft.com/office/drawing/2014/main" id="{B70D33B1-5E52-36FE-EEA4-95CE9D5DDF69}"/>
-                </a:ext>
-              </a:extLst>
-            </p:cNvPr>
-            <p:cNvSpPr/>
-            <p:nvPr/>
-          </p:nvSpPr>
-          <p:spPr>
-            <a:xfrm>
-              <a:off x="320040" y="4617720"/>
-              <a:ext cx="8503920" cy="347472"/>
-            </a:xfrm>
-            <a:prstGeom prst="rect">
-              <a:avLst/>
-            </a:prstGeom>
-            <a:solidFill>
-              <a:srgbClr val="1B2A4A"/>
-            </a:solidFill>
-            <a:ln w="12700">
-              <a:solidFill>
-                <a:srgbClr val="1B2A4A"/>
-              </a:solidFill>
-              <a:prstDash val="solid"/>
-            </a:ln>
-            <a:effectLst>
-              <a:outerShdw blurRad="101600" dist="38100" dir="8100000" algn="bl" rotWithShape="0">
-                <a:srgbClr val="000000">
-                  <a:alpha val="18000"/>
-                </a:srgbClr>
-              </a:outerShdw>
-            </a:effectLst>
-          </p:spPr>
-          <p:txBody>
-            <a:bodyPr/>
-            <a:lstStyle/>
-            <a:p>
-              <a:endParaRPr lang="ko-KR" altLang="en-US" sz="1400" dirty="0"/>
-            </a:p>
-          </p:txBody>
-        </p:sp>
-        <p:sp>
-          <p:nvSpPr>
-            <p:cNvPr id="57" name="Text 20">
-              <a:extLst>
-                <a:ext uri="{FF2B5EF4-FFF2-40B4-BE49-F238E27FC236}">
-                  <a16:creationId xmlns:a16="http://schemas.microsoft.com/office/drawing/2014/main" id="{547CD1AB-C3F3-2C5B-5B27-268CF7F51C37}"/>
-                </a:ext>
-              </a:extLst>
-            </p:cNvPr>
-            <p:cNvSpPr/>
-            <p:nvPr/>
-          </p:nvSpPr>
-          <p:spPr>
-            <a:xfrm>
-              <a:off x="411480" y="4645152"/>
-              <a:ext cx="8321040" cy="274320"/>
-            </a:xfrm>
-            <a:prstGeom prst="rect">
-              <a:avLst/>
-            </a:prstGeom>
-            <a:noFill/>
-            <a:ln/>
-          </p:spPr>
-          <p:txBody>
-            <a:bodyPr wrap="square" lIns="0" tIns="0" rIns="0" bIns="0" rtlCol="0" anchor="ctr"/>
-            <a:lstStyle/>
-            <a:p>
-              <a:pPr marL="0" indent="0" algn="ctr">
-                <a:buNone/>
-              </a:pPr>
-              <a:r>
-                <a:rPr lang="en-US" sz="1600" dirty="0">
-                  <a:solidFill>
-                    <a:srgbClr val="FFFFFF"/>
-                  </a:solidFill>
-                </a:rPr>
-                <a:t>목표: 제조 라인의 건반 외관 결함을 실시간으로 자동 감지하여 품질 불량률 제로화</a:t>
-              </a:r>
-              <a:endParaRPr lang="en-US" sz="1600" dirty="0"/>
-            </a:p>
-          </p:txBody>
-        </p:sp>
-      </p:grpSp>
-    </p:spTree>
-    <p:extLst>
-      <p:ext uri="{BB962C8B-B14F-4D97-AF65-F5344CB8AC3E}">
-        <p14:creationId xmlns:p14="http://schemas.microsoft.com/office/powerpoint/2010/main" val="3695342319"/>
-      </p:ext>
-    </p:extLst>
-  </p:cSld>
-  <p:clrMapOvr>
-    <a:masterClrMapping/>
-  </p:clrMapOvr>
-</p:sld>
-</file>
-
-<file path=ppt/slides/slide20.xml><?xml version="1.0" encoding="utf-8"?>
+<file path=ppt/slides/slide21.xml><?xml version="1.0" encoding="utf-8"?>
 <p:sld xmlns:a="http://schemas.openxmlformats.org/drawingml/2006/main" xmlns:r="http://schemas.openxmlformats.org/officeDocument/2006/relationships" xmlns:p="http://schemas.openxmlformats.org/presentationml/2006/main">
   <p:cSld>
     <p:spTree>
@@ -12356,7 +12731,7 @@
 </p:sld>
 </file>
 
-<file path=ppt/slides/slide21.xml><?xml version="1.0" encoding="utf-8"?>
+<file path=ppt/slides/slide22.xml><?xml version="1.0" encoding="utf-8"?>
 <p:sld xmlns:a="http://schemas.openxmlformats.org/drawingml/2006/main" xmlns:r="http://schemas.openxmlformats.org/officeDocument/2006/relationships" xmlns:p="http://schemas.openxmlformats.org/presentationml/2006/main">
   <p:cSld>
     <p:spTree>
